--- a/ClassMaterials/ICT_Practical--Class7-review-Computerparts.pptx
+++ b/ClassMaterials/ICT_Practical--Class7-review-Computerparts.pptx
@@ -19,17 +19,14 @@
     <p:sldId id="267" r:id="rId13"/>
     <p:sldId id="268" r:id="rId14"/>
     <p:sldId id="269" r:id="rId15"/>
-    <p:sldId id="270" r:id="rId16"/>
-    <p:sldId id="271" r:id="rId17"/>
-    <p:sldId id="272" r:id="rId18"/>
   </p:sldIdLst>
   <p:sldSz cx="12192000" cy="6858000"/>
   <p:notesSz cx="6858000" cy="9144000"/>
   <p:embeddedFontLst>
     <p:embeddedFont>
       <p:font typeface="Hind Siliguri" panose="02000000000000000000" pitchFamily="2" charset="0"/>
-      <p:regular r:id="rId19"/>
-      <p:bold r:id="rId20"/>
+      <p:regular r:id="rId16"/>
+      <p:bold r:id="rId17"/>
     </p:embeddedFont>
   </p:embeddedFontLst>
   <p:defaultTextStyle>
@@ -150,17 +147,257 @@
 <pc:chgInfo xmlns:a="http://schemas.openxmlformats.org/drawingml/2006/main" xmlns:r="http://schemas.openxmlformats.org/officeDocument/2006/relationships" xmlns:ac="http://schemas.microsoft.com/office/drawing/2013/main/command" xmlns:pc="http://schemas.microsoft.com/office/powerpoint/2013/main/command">
   <pc:docChgLst>
     <pc:chgData name="Rezaur Rahman" userId="3a4486d7030a1889" providerId="LiveId" clId="{D1B430C1-0409-411D-B3DE-A0AB3CF13E85}"/>
-    <pc:docChg chg="custSel modSld">
-      <pc:chgData name="Rezaur Rahman" userId="3a4486d7030a1889" providerId="LiveId" clId="{D1B430C1-0409-411D-B3DE-A0AB3CF13E85}" dt="2026-10-13T04:02:00.269" v="11" actId="1076"/>
+    <pc:docChg chg="undo custSel delSld modSld">
+      <pc:chgData name="Rezaur Rahman" userId="3a4486d7030a1889" providerId="LiveId" clId="{D1B430C1-0409-411D-B3DE-A0AB3CF13E85}" dt="2026-10-18T04:26:51.447" v="162" actId="47"/>
       <pc:docMkLst>
         <pc:docMk/>
       </pc:docMkLst>
+      <pc:sldChg chg="modSp mod">
+        <pc:chgData name="Rezaur Rahman" userId="3a4486d7030a1889" providerId="LiveId" clId="{D1B430C1-0409-411D-B3DE-A0AB3CF13E85}" dt="2026-10-18T04:21:13.601" v="15" actId="403"/>
+        <pc:sldMkLst>
+          <pc:docMk/>
+          <pc:sldMk cId="0" sldId="256"/>
+        </pc:sldMkLst>
+        <pc:spChg chg="mod">
+          <ac:chgData name="Rezaur Rahman" userId="3a4486d7030a1889" providerId="LiveId" clId="{D1B430C1-0409-411D-B3DE-A0AB3CF13E85}" dt="2026-10-18T04:21:13.601" v="15" actId="403"/>
+          <ac:spMkLst>
+            <pc:docMk/>
+            <pc:sldMk cId="0" sldId="256"/>
+            <ac:spMk id="5" creationId="{00000000-0000-0000-0000-000000000000}"/>
+          </ac:spMkLst>
+        </pc:spChg>
+      </pc:sldChg>
+      <pc:sldChg chg="modSp mod">
+        <pc:chgData name="Rezaur Rahman" userId="3a4486d7030a1889" providerId="LiveId" clId="{D1B430C1-0409-411D-B3DE-A0AB3CF13E85}" dt="2026-10-18T04:21:24.726" v="19" actId="403"/>
+        <pc:sldMkLst>
+          <pc:docMk/>
+          <pc:sldMk cId="0" sldId="257"/>
+        </pc:sldMkLst>
+        <pc:spChg chg="mod">
+          <ac:chgData name="Rezaur Rahman" userId="3a4486d7030a1889" providerId="LiveId" clId="{D1B430C1-0409-411D-B3DE-A0AB3CF13E85}" dt="2026-10-18T04:21:24.726" v="19" actId="403"/>
+          <ac:spMkLst>
+            <pc:docMk/>
+            <pc:sldMk cId="0" sldId="257"/>
+            <ac:spMk id="4" creationId="{00000000-0000-0000-0000-000000000000}"/>
+          </ac:spMkLst>
+        </pc:spChg>
+      </pc:sldChg>
+      <pc:sldChg chg="modSp mod">
+        <pc:chgData name="Rezaur Rahman" userId="3a4486d7030a1889" providerId="LiveId" clId="{D1B430C1-0409-411D-B3DE-A0AB3CF13E85}" dt="2026-10-18T04:22:05.508" v="36" actId="403"/>
+        <pc:sldMkLst>
+          <pc:docMk/>
+          <pc:sldMk cId="0" sldId="258"/>
+        </pc:sldMkLst>
+        <pc:spChg chg="mod">
+          <ac:chgData name="Rezaur Rahman" userId="3a4486d7030a1889" providerId="LiveId" clId="{D1B430C1-0409-411D-B3DE-A0AB3CF13E85}" dt="2026-10-18T04:22:05.508" v="36" actId="403"/>
+          <ac:spMkLst>
+            <pc:docMk/>
+            <pc:sldMk cId="0" sldId="258"/>
+            <ac:spMk id="7" creationId="{00000000-0000-0000-0000-000000000000}"/>
+          </ac:spMkLst>
+        </pc:spChg>
+        <pc:spChg chg="mod">
+          <ac:chgData name="Rezaur Rahman" userId="3a4486d7030a1889" providerId="LiveId" clId="{D1B430C1-0409-411D-B3DE-A0AB3CF13E85}" dt="2026-10-18T04:21:44.422" v="29" actId="403"/>
+          <ac:spMkLst>
+            <pc:docMk/>
+            <pc:sldMk cId="0" sldId="258"/>
+            <ac:spMk id="8" creationId="{00000000-0000-0000-0000-000000000000}"/>
+          </ac:spMkLst>
+        </pc:spChg>
+        <pc:spChg chg="mod">
+          <ac:chgData name="Rezaur Rahman" userId="3a4486d7030a1889" providerId="LiveId" clId="{D1B430C1-0409-411D-B3DE-A0AB3CF13E85}" dt="2026-10-18T04:21:55.315" v="32" actId="403"/>
+          <ac:spMkLst>
+            <pc:docMk/>
+            <pc:sldMk cId="0" sldId="258"/>
+            <ac:spMk id="9" creationId="{00000000-0000-0000-0000-000000000000}"/>
+          </ac:spMkLst>
+        </pc:spChg>
+        <pc:spChg chg="mod">
+          <ac:chgData name="Rezaur Rahman" userId="3a4486d7030a1889" providerId="LiveId" clId="{D1B430C1-0409-411D-B3DE-A0AB3CF13E85}" dt="2026-10-18T04:22:00.122" v="33" actId="403"/>
+          <ac:spMkLst>
+            <pc:docMk/>
+            <pc:sldMk cId="0" sldId="258"/>
+            <ac:spMk id="10" creationId="{00000000-0000-0000-0000-000000000000}"/>
+          </ac:spMkLst>
+        </pc:spChg>
+      </pc:sldChg>
+      <pc:sldChg chg="modSp mod">
+        <pc:chgData name="Rezaur Rahman" userId="3a4486d7030a1889" providerId="LiveId" clId="{D1B430C1-0409-411D-B3DE-A0AB3CF13E85}" dt="2026-10-18T04:22:37.543" v="49" actId="403"/>
+        <pc:sldMkLst>
+          <pc:docMk/>
+          <pc:sldMk cId="0" sldId="259"/>
+        </pc:sldMkLst>
+        <pc:spChg chg="mod">
+          <ac:chgData name="Rezaur Rahman" userId="3a4486d7030a1889" providerId="LiveId" clId="{D1B430C1-0409-411D-B3DE-A0AB3CF13E85}" dt="2026-10-18T04:22:28.656" v="46" actId="403"/>
+          <ac:spMkLst>
+            <pc:docMk/>
+            <pc:sldMk cId="0" sldId="259"/>
+            <ac:spMk id="7" creationId="{00000000-0000-0000-0000-000000000000}"/>
+          </ac:spMkLst>
+        </pc:spChg>
+        <pc:spChg chg="mod">
+          <ac:chgData name="Rezaur Rahman" userId="3a4486d7030a1889" providerId="LiveId" clId="{D1B430C1-0409-411D-B3DE-A0AB3CF13E85}" dt="2026-10-18T04:22:23.410" v="44" actId="403"/>
+          <ac:spMkLst>
+            <pc:docMk/>
+            <pc:sldMk cId="0" sldId="259"/>
+            <ac:spMk id="8" creationId="{00000000-0000-0000-0000-000000000000}"/>
+          </ac:spMkLst>
+        </pc:spChg>
+        <pc:spChg chg="mod">
+          <ac:chgData name="Rezaur Rahman" userId="3a4486d7030a1889" providerId="LiveId" clId="{D1B430C1-0409-411D-B3DE-A0AB3CF13E85}" dt="2026-10-18T04:22:37.543" v="49" actId="403"/>
+          <ac:spMkLst>
+            <pc:docMk/>
+            <pc:sldMk cId="0" sldId="259"/>
+            <ac:spMk id="9" creationId="{00000000-0000-0000-0000-000000000000}"/>
+          </ac:spMkLst>
+        </pc:spChg>
+        <pc:spChg chg="mod">
+          <ac:chgData name="Rezaur Rahman" userId="3a4486d7030a1889" providerId="LiveId" clId="{D1B430C1-0409-411D-B3DE-A0AB3CF13E85}" dt="2026-10-18T04:22:17.493" v="40" actId="403"/>
+          <ac:spMkLst>
+            <pc:docMk/>
+            <pc:sldMk cId="0" sldId="259"/>
+            <ac:spMk id="10" creationId="{00000000-0000-0000-0000-000000000000}"/>
+          </ac:spMkLst>
+        </pc:spChg>
+      </pc:sldChg>
+      <pc:sldChg chg="modSp mod">
+        <pc:chgData name="Rezaur Rahman" userId="3a4486d7030a1889" providerId="LiveId" clId="{D1B430C1-0409-411D-B3DE-A0AB3CF13E85}" dt="2026-10-18T04:23:55.057" v="83" actId="404"/>
+        <pc:sldMkLst>
+          <pc:docMk/>
+          <pc:sldMk cId="0" sldId="260"/>
+        </pc:sldMkLst>
+        <pc:spChg chg="mod">
+          <ac:chgData name="Rezaur Rahman" userId="3a4486d7030a1889" providerId="LiveId" clId="{D1B430C1-0409-411D-B3DE-A0AB3CF13E85}" dt="2026-10-18T04:22:49.242" v="52" actId="403"/>
+          <ac:spMkLst>
+            <pc:docMk/>
+            <pc:sldMk cId="0" sldId="260"/>
+            <ac:spMk id="2" creationId="{00000000-0000-0000-0000-000000000000}"/>
+          </ac:spMkLst>
+        </pc:spChg>
+        <pc:spChg chg="mod">
+          <ac:chgData name="Rezaur Rahman" userId="3a4486d7030a1889" providerId="LiveId" clId="{D1B430C1-0409-411D-B3DE-A0AB3CF13E85}" dt="2026-10-18T04:23:33.641" v="74" actId="403"/>
+          <ac:spMkLst>
+            <pc:docMk/>
+            <pc:sldMk cId="0" sldId="260"/>
+            <ac:spMk id="7" creationId="{00000000-0000-0000-0000-000000000000}"/>
+          </ac:spMkLst>
+        </pc:spChg>
+        <pc:spChg chg="mod">
+          <ac:chgData name="Rezaur Rahman" userId="3a4486d7030a1889" providerId="LiveId" clId="{D1B430C1-0409-411D-B3DE-A0AB3CF13E85}" dt="2026-10-18T04:23:55.057" v="83" actId="404"/>
+          <ac:spMkLst>
+            <pc:docMk/>
+            <pc:sldMk cId="0" sldId="260"/>
+            <ac:spMk id="8" creationId="{00000000-0000-0000-0000-000000000000}"/>
+          </ac:spMkLst>
+        </pc:spChg>
+        <pc:spChg chg="mod">
+          <ac:chgData name="Rezaur Rahman" userId="3a4486d7030a1889" providerId="LiveId" clId="{D1B430C1-0409-411D-B3DE-A0AB3CF13E85}" dt="2026-10-18T04:23:40.072" v="77" actId="403"/>
+          <ac:spMkLst>
+            <pc:docMk/>
+            <pc:sldMk cId="0" sldId="260"/>
+            <ac:spMk id="9" creationId="{00000000-0000-0000-0000-000000000000}"/>
+          </ac:spMkLst>
+        </pc:spChg>
+        <pc:spChg chg="mod">
+          <ac:chgData name="Rezaur Rahman" userId="3a4486d7030a1889" providerId="LiveId" clId="{D1B430C1-0409-411D-B3DE-A0AB3CF13E85}" dt="2026-10-18T04:23:50.481" v="82" actId="403"/>
+          <ac:spMkLst>
+            <pc:docMk/>
+            <pc:sldMk cId="0" sldId="260"/>
+            <ac:spMk id="10" creationId="{00000000-0000-0000-0000-000000000000}"/>
+          </ac:spMkLst>
+        </pc:spChg>
+      </pc:sldChg>
+      <pc:sldChg chg="modSp mod">
+        <pc:chgData name="Rezaur Rahman" userId="3a4486d7030a1889" providerId="LiveId" clId="{D1B430C1-0409-411D-B3DE-A0AB3CF13E85}" dt="2026-10-18T04:24:10.159" v="91" actId="403"/>
+        <pc:sldMkLst>
+          <pc:docMk/>
+          <pc:sldMk cId="0" sldId="261"/>
+        </pc:sldMkLst>
+        <pc:spChg chg="mod">
+          <ac:chgData name="Rezaur Rahman" userId="3a4486d7030a1889" providerId="LiveId" clId="{D1B430C1-0409-411D-B3DE-A0AB3CF13E85}" dt="2026-10-18T04:24:03.253" v="87" actId="403"/>
+          <ac:spMkLst>
+            <pc:docMk/>
+            <pc:sldMk cId="0" sldId="261"/>
+            <ac:spMk id="8" creationId="{00000000-0000-0000-0000-000000000000}"/>
+          </ac:spMkLst>
+        </pc:spChg>
+        <pc:spChg chg="mod">
+          <ac:chgData name="Rezaur Rahman" userId="3a4486d7030a1889" providerId="LiveId" clId="{D1B430C1-0409-411D-B3DE-A0AB3CF13E85}" dt="2026-10-18T04:24:10.159" v="91" actId="403"/>
+          <ac:spMkLst>
+            <pc:docMk/>
+            <pc:sldMk cId="0" sldId="261"/>
+            <ac:spMk id="10" creationId="{00000000-0000-0000-0000-000000000000}"/>
+          </ac:spMkLst>
+        </pc:spChg>
+      </pc:sldChg>
+      <pc:sldChg chg="modSp mod">
+        <pc:chgData name="Rezaur Rahman" userId="3a4486d7030a1889" providerId="LiveId" clId="{D1B430C1-0409-411D-B3DE-A0AB3CF13E85}" dt="2026-10-18T04:24:26.072" v="99" actId="403"/>
+        <pc:sldMkLst>
+          <pc:docMk/>
+          <pc:sldMk cId="0" sldId="262"/>
+        </pc:sldMkLst>
+        <pc:spChg chg="mod">
+          <ac:chgData name="Rezaur Rahman" userId="3a4486d7030a1889" providerId="LiveId" clId="{D1B430C1-0409-411D-B3DE-A0AB3CF13E85}" dt="2026-10-18T04:24:21.081" v="95" actId="403"/>
+          <ac:spMkLst>
+            <pc:docMk/>
+            <pc:sldMk cId="0" sldId="262"/>
+            <ac:spMk id="8" creationId="{00000000-0000-0000-0000-000000000000}"/>
+          </ac:spMkLst>
+        </pc:spChg>
+        <pc:spChg chg="mod">
+          <ac:chgData name="Rezaur Rahman" userId="3a4486d7030a1889" providerId="LiveId" clId="{D1B430C1-0409-411D-B3DE-A0AB3CF13E85}" dt="2026-10-18T04:24:26.072" v="99" actId="403"/>
+          <ac:spMkLst>
+            <pc:docMk/>
+            <pc:sldMk cId="0" sldId="262"/>
+            <ac:spMk id="10" creationId="{00000000-0000-0000-0000-000000000000}"/>
+          </ac:spMkLst>
+        </pc:spChg>
+      </pc:sldChg>
+      <pc:sldChg chg="modSp mod">
+        <pc:chgData name="Rezaur Rahman" userId="3a4486d7030a1889" providerId="LiveId" clId="{D1B430C1-0409-411D-B3DE-A0AB3CF13E85}" dt="2026-10-18T04:24:39.986" v="107" actId="403"/>
+        <pc:sldMkLst>
+          <pc:docMk/>
+          <pc:sldMk cId="0" sldId="263"/>
+        </pc:sldMkLst>
+        <pc:spChg chg="mod">
+          <ac:chgData name="Rezaur Rahman" userId="3a4486d7030a1889" providerId="LiveId" clId="{D1B430C1-0409-411D-B3DE-A0AB3CF13E85}" dt="2026-10-18T04:24:34.787" v="103" actId="403"/>
+          <ac:spMkLst>
+            <pc:docMk/>
+            <pc:sldMk cId="0" sldId="263"/>
+            <ac:spMk id="8" creationId="{00000000-0000-0000-0000-000000000000}"/>
+          </ac:spMkLst>
+        </pc:spChg>
+        <pc:spChg chg="mod">
+          <ac:chgData name="Rezaur Rahman" userId="3a4486d7030a1889" providerId="LiveId" clId="{D1B430C1-0409-411D-B3DE-A0AB3CF13E85}" dt="2026-10-18T04:24:39.986" v="107" actId="403"/>
+          <ac:spMkLst>
+            <pc:docMk/>
+            <pc:sldMk cId="0" sldId="263"/>
+            <ac:spMk id="10" creationId="{00000000-0000-0000-0000-000000000000}"/>
+          </ac:spMkLst>
+        </pc:spChg>
+      </pc:sldChg>
       <pc:sldChg chg="addSp modSp mod">
-        <pc:chgData name="Rezaur Rahman" userId="3a4486d7030a1889" providerId="LiveId" clId="{D1B430C1-0409-411D-B3DE-A0AB3CF13E85}" dt="2026-10-13T04:00:29.456" v="2" actId="14100"/>
+        <pc:chgData name="Rezaur Rahman" userId="3a4486d7030a1889" providerId="LiveId" clId="{D1B430C1-0409-411D-B3DE-A0AB3CF13E85}" dt="2026-10-18T04:24:51.157" v="115" actId="403"/>
         <pc:sldMkLst>
           <pc:docMk/>
           <pc:sldMk cId="0" sldId="264"/>
         </pc:sldMkLst>
+        <pc:spChg chg="mod">
+          <ac:chgData name="Rezaur Rahman" userId="3a4486d7030a1889" providerId="LiveId" clId="{D1B430C1-0409-411D-B3DE-A0AB3CF13E85}" dt="2026-10-18T04:24:46.418" v="111" actId="403"/>
+          <ac:spMkLst>
+            <pc:docMk/>
+            <pc:sldMk cId="0" sldId="264"/>
+            <ac:spMk id="8" creationId="{00000000-0000-0000-0000-000000000000}"/>
+          </ac:spMkLst>
+        </pc:spChg>
+        <pc:spChg chg="mod">
+          <ac:chgData name="Rezaur Rahman" userId="3a4486d7030a1889" providerId="LiveId" clId="{D1B430C1-0409-411D-B3DE-A0AB3CF13E85}" dt="2026-10-18T04:24:51.157" v="115" actId="403"/>
+          <ac:spMkLst>
+            <pc:docMk/>
+            <pc:sldMk cId="0" sldId="264"/>
+            <ac:spMk id="10" creationId="{00000000-0000-0000-0000-000000000000}"/>
+          </ac:spMkLst>
+        </pc:spChg>
         <pc:picChg chg="add mod">
           <ac:chgData name="Rezaur Rahman" userId="3a4486d7030a1889" providerId="LiveId" clId="{D1B430C1-0409-411D-B3DE-A0AB3CF13E85}" dt="2026-10-13T04:00:29.456" v="2" actId="14100"/>
           <ac:picMkLst>
@@ -170,20 +407,51 @@
           </ac:picMkLst>
         </pc:picChg>
       </pc:sldChg>
+      <pc:sldChg chg="modSp mod">
+        <pc:chgData name="Rezaur Rahman" userId="3a4486d7030a1889" providerId="LiveId" clId="{D1B430C1-0409-411D-B3DE-A0AB3CF13E85}" dt="2026-10-18T04:25:06.399" v="124" actId="404"/>
+        <pc:sldMkLst>
+          <pc:docMk/>
+          <pc:sldMk cId="0" sldId="265"/>
+        </pc:sldMkLst>
+        <pc:spChg chg="mod">
+          <ac:chgData name="Rezaur Rahman" userId="3a4486d7030a1889" providerId="LiveId" clId="{D1B430C1-0409-411D-B3DE-A0AB3CF13E85}" dt="2026-10-18T04:24:58.756" v="119" actId="403"/>
+          <ac:spMkLst>
+            <pc:docMk/>
+            <pc:sldMk cId="0" sldId="265"/>
+            <ac:spMk id="8" creationId="{00000000-0000-0000-0000-000000000000}"/>
+          </ac:spMkLst>
+        </pc:spChg>
+        <pc:spChg chg="mod">
+          <ac:chgData name="Rezaur Rahman" userId="3a4486d7030a1889" providerId="LiveId" clId="{D1B430C1-0409-411D-B3DE-A0AB3CF13E85}" dt="2026-10-18T04:25:06.399" v="124" actId="404"/>
+          <ac:spMkLst>
+            <pc:docMk/>
+            <pc:sldMk cId="0" sldId="265"/>
+            <ac:spMk id="10" creationId="{00000000-0000-0000-0000-000000000000}"/>
+          </ac:spMkLst>
+        </pc:spChg>
+      </pc:sldChg>
       <pc:sldChg chg="addSp delSp modSp mod">
-        <pc:chgData name="Rezaur Rahman" userId="3a4486d7030a1889" providerId="LiveId" clId="{D1B430C1-0409-411D-B3DE-A0AB3CF13E85}" dt="2026-10-13T04:02:00.269" v="11" actId="1076"/>
+        <pc:chgData name="Rezaur Rahman" userId="3a4486d7030a1889" providerId="LiveId" clId="{D1B430C1-0409-411D-B3DE-A0AB3CF13E85}" dt="2026-10-18T04:25:28.414" v="135" actId="403"/>
         <pc:sldMkLst>
           <pc:docMk/>
           <pc:sldMk cId="0" sldId="266"/>
         </pc:sldMkLst>
-        <pc:picChg chg="add del mod">
-          <ac:chgData name="Rezaur Rahman" userId="3a4486d7030a1889" providerId="LiveId" clId="{D1B430C1-0409-411D-B3DE-A0AB3CF13E85}" dt="2026-10-13T04:01:43.501" v="6" actId="478"/>
-          <ac:picMkLst>
+        <pc:spChg chg="mod">
+          <ac:chgData name="Rezaur Rahman" userId="3a4486d7030a1889" providerId="LiveId" clId="{D1B430C1-0409-411D-B3DE-A0AB3CF13E85}" dt="2026-10-18T04:25:28.414" v="135" actId="403"/>
+          <ac:spMkLst>
             <pc:docMk/>
             <pc:sldMk cId="0" sldId="266"/>
-            <ac:picMk id="12" creationId="{4D87C26B-B07E-4AAF-B209-E2EEF42EE261}"/>
-          </ac:picMkLst>
-        </pc:picChg>
+            <ac:spMk id="8" creationId="{00000000-0000-0000-0000-000000000000}"/>
+          </ac:spMkLst>
+        </pc:spChg>
+        <pc:spChg chg="mod">
+          <ac:chgData name="Rezaur Rahman" userId="3a4486d7030a1889" providerId="LiveId" clId="{D1B430C1-0409-411D-B3DE-A0AB3CF13E85}" dt="2026-10-18T04:25:23.470" v="134" actId="403"/>
+          <ac:spMkLst>
+            <pc:docMk/>
+            <pc:sldMk cId="0" sldId="266"/>
+            <ac:spMk id="10" creationId="{00000000-0000-0000-0000-000000000000}"/>
+          </ac:spMkLst>
+        </pc:spChg>
         <pc:picChg chg="add mod">
           <ac:chgData name="Rezaur Rahman" userId="3a4486d7030a1889" providerId="LiveId" clId="{D1B430C1-0409-411D-B3DE-A0AB3CF13E85}" dt="2026-10-13T04:02:00.269" v="11" actId="1076"/>
           <ac:picMkLst>
@@ -192,6 +460,96 @@
             <ac:picMk id="14" creationId="{70FE6268-7ED6-3617-EEB0-692DA5F34CC7}"/>
           </ac:picMkLst>
         </pc:picChg>
+      </pc:sldChg>
+      <pc:sldChg chg="modSp mod">
+        <pc:chgData name="Rezaur Rahman" userId="3a4486d7030a1889" providerId="LiveId" clId="{D1B430C1-0409-411D-B3DE-A0AB3CF13E85}" dt="2026-10-18T04:25:40.046" v="143" actId="403"/>
+        <pc:sldMkLst>
+          <pc:docMk/>
+          <pc:sldMk cId="0" sldId="267"/>
+        </pc:sldMkLst>
+        <pc:spChg chg="mod">
+          <ac:chgData name="Rezaur Rahman" userId="3a4486d7030a1889" providerId="LiveId" clId="{D1B430C1-0409-411D-B3DE-A0AB3CF13E85}" dt="2026-10-18T04:25:35.582" v="139" actId="403"/>
+          <ac:spMkLst>
+            <pc:docMk/>
+            <pc:sldMk cId="0" sldId="267"/>
+            <ac:spMk id="8" creationId="{00000000-0000-0000-0000-000000000000}"/>
+          </ac:spMkLst>
+        </pc:spChg>
+        <pc:spChg chg="mod">
+          <ac:chgData name="Rezaur Rahman" userId="3a4486d7030a1889" providerId="LiveId" clId="{D1B430C1-0409-411D-B3DE-A0AB3CF13E85}" dt="2026-10-18T04:25:40.046" v="143" actId="403"/>
+          <ac:spMkLst>
+            <pc:docMk/>
+            <pc:sldMk cId="0" sldId="267"/>
+            <ac:spMk id="10" creationId="{00000000-0000-0000-0000-000000000000}"/>
+          </ac:spMkLst>
+        </pc:spChg>
+      </pc:sldChg>
+      <pc:sldChg chg="modSp mod">
+        <pc:chgData name="Rezaur Rahman" userId="3a4486d7030a1889" providerId="LiveId" clId="{D1B430C1-0409-411D-B3DE-A0AB3CF13E85}" dt="2026-10-18T04:25:50.751" v="151" actId="403"/>
+        <pc:sldMkLst>
+          <pc:docMk/>
+          <pc:sldMk cId="0" sldId="268"/>
+        </pc:sldMkLst>
+        <pc:spChg chg="mod">
+          <ac:chgData name="Rezaur Rahman" userId="3a4486d7030a1889" providerId="LiveId" clId="{D1B430C1-0409-411D-B3DE-A0AB3CF13E85}" dt="2026-10-18T04:25:46.554" v="147" actId="403"/>
+          <ac:spMkLst>
+            <pc:docMk/>
+            <pc:sldMk cId="0" sldId="268"/>
+            <ac:spMk id="8" creationId="{00000000-0000-0000-0000-000000000000}"/>
+          </ac:spMkLst>
+        </pc:spChg>
+        <pc:spChg chg="mod">
+          <ac:chgData name="Rezaur Rahman" userId="3a4486d7030a1889" providerId="LiveId" clId="{D1B430C1-0409-411D-B3DE-A0AB3CF13E85}" dt="2026-10-18T04:25:50.751" v="151" actId="403"/>
+          <ac:spMkLst>
+            <pc:docMk/>
+            <pc:sldMk cId="0" sldId="268"/>
+            <ac:spMk id="10" creationId="{00000000-0000-0000-0000-000000000000}"/>
+          </ac:spMkLst>
+        </pc:spChg>
+      </pc:sldChg>
+      <pc:sldChg chg="modSp mod">
+        <pc:chgData name="Rezaur Rahman" userId="3a4486d7030a1889" providerId="LiveId" clId="{D1B430C1-0409-411D-B3DE-A0AB3CF13E85}" dt="2026-10-18T04:26:01.503" v="159" actId="403"/>
+        <pc:sldMkLst>
+          <pc:docMk/>
+          <pc:sldMk cId="0" sldId="269"/>
+        </pc:sldMkLst>
+        <pc:spChg chg="mod">
+          <ac:chgData name="Rezaur Rahman" userId="3a4486d7030a1889" providerId="LiveId" clId="{D1B430C1-0409-411D-B3DE-A0AB3CF13E85}" dt="2026-10-18T04:25:57.607" v="155" actId="403"/>
+          <ac:spMkLst>
+            <pc:docMk/>
+            <pc:sldMk cId="0" sldId="269"/>
+            <ac:spMk id="8" creationId="{00000000-0000-0000-0000-000000000000}"/>
+          </ac:spMkLst>
+        </pc:spChg>
+        <pc:spChg chg="mod">
+          <ac:chgData name="Rezaur Rahman" userId="3a4486d7030a1889" providerId="LiveId" clId="{D1B430C1-0409-411D-B3DE-A0AB3CF13E85}" dt="2026-10-18T04:26:01.503" v="159" actId="403"/>
+          <ac:spMkLst>
+            <pc:docMk/>
+            <pc:sldMk cId="0" sldId="269"/>
+            <ac:spMk id="10" creationId="{00000000-0000-0000-0000-000000000000}"/>
+          </ac:spMkLst>
+        </pc:spChg>
+      </pc:sldChg>
+      <pc:sldChg chg="del">
+        <pc:chgData name="Rezaur Rahman" userId="3a4486d7030a1889" providerId="LiveId" clId="{D1B430C1-0409-411D-B3DE-A0AB3CF13E85}" dt="2026-10-18T04:26:51.447" v="162" actId="47"/>
+        <pc:sldMkLst>
+          <pc:docMk/>
+          <pc:sldMk cId="0" sldId="270"/>
+        </pc:sldMkLst>
+      </pc:sldChg>
+      <pc:sldChg chg="del">
+        <pc:chgData name="Rezaur Rahman" userId="3a4486d7030a1889" providerId="LiveId" clId="{D1B430C1-0409-411D-B3DE-A0AB3CF13E85}" dt="2026-10-18T04:26:47.112" v="160" actId="47"/>
+        <pc:sldMkLst>
+          <pc:docMk/>
+          <pc:sldMk cId="0" sldId="271"/>
+        </pc:sldMkLst>
+      </pc:sldChg>
+      <pc:sldChg chg="del">
+        <pc:chgData name="Rezaur Rahman" userId="3a4486d7030a1889" providerId="LiveId" clId="{D1B430C1-0409-411D-B3DE-A0AB3CF13E85}" dt="2026-10-18T04:26:48.196" v="161" actId="47"/>
+        <pc:sldMkLst>
+          <pc:docMk/>
+          <pc:sldMk cId="0" sldId="272"/>
+        </pc:sldMkLst>
       </pc:sldChg>
     </pc:docChg>
   </pc:docChgLst>
@@ -377,7 +735,7 @@
           <a:p>
             <a:fld id="{5BCAD085-E8A6-8845-BD4E-CB4CCA059FC4}" type="datetimeFigureOut">
               <a:rPr lang="en-US" smtClean="0"/>
-              <a:t>10/12/2026</a:t>
+              <a:t>10/17/2026</a:t>
             </a:fld>
             <a:endParaRPr lang="en-US"/>
           </a:p>
@@ -545,7 +903,7 @@
           <a:p>
             <a:fld id="{5BCAD085-E8A6-8845-BD4E-CB4CCA059FC4}" type="datetimeFigureOut">
               <a:rPr lang="en-US" smtClean="0"/>
-              <a:t>10/12/2026</a:t>
+              <a:t>10/17/2026</a:t>
             </a:fld>
             <a:endParaRPr lang="en-US"/>
           </a:p>
@@ -723,7 +1081,7 @@
           <a:p>
             <a:fld id="{5BCAD085-E8A6-8845-BD4E-CB4CCA059FC4}" type="datetimeFigureOut">
               <a:rPr lang="en-US" smtClean="0"/>
-              <a:t>10/12/2026</a:t>
+              <a:t>10/17/2026</a:t>
             </a:fld>
             <a:endParaRPr lang="en-US"/>
           </a:p>
@@ -891,7 +1249,7 @@
           <a:p>
             <a:fld id="{5BCAD085-E8A6-8845-BD4E-CB4CCA059FC4}" type="datetimeFigureOut">
               <a:rPr lang="en-US" smtClean="0"/>
-              <a:t>10/12/2026</a:t>
+              <a:t>10/17/2026</a:t>
             </a:fld>
             <a:endParaRPr lang="en-US"/>
           </a:p>
@@ -1136,7 +1494,7 @@
           <a:p>
             <a:fld id="{5BCAD085-E8A6-8845-BD4E-CB4CCA059FC4}" type="datetimeFigureOut">
               <a:rPr lang="en-US" smtClean="0"/>
-              <a:t>10/12/2026</a:t>
+              <a:t>10/17/2026</a:t>
             </a:fld>
             <a:endParaRPr lang="en-US"/>
           </a:p>
@@ -1421,7 +1779,7 @@
           <a:p>
             <a:fld id="{5BCAD085-E8A6-8845-BD4E-CB4CCA059FC4}" type="datetimeFigureOut">
               <a:rPr lang="en-US" smtClean="0"/>
-              <a:t>10/12/2026</a:t>
+              <a:t>10/17/2026</a:t>
             </a:fld>
             <a:endParaRPr lang="en-US"/>
           </a:p>
@@ -1840,7 +2198,7 @@
           <a:p>
             <a:fld id="{5BCAD085-E8A6-8845-BD4E-CB4CCA059FC4}" type="datetimeFigureOut">
               <a:rPr lang="en-US" smtClean="0"/>
-              <a:t>10/12/2026</a:t>
+              <a:t>10/17/2026</a:t>
             </a:fld>
             <a:endParaRPr lang="en-US"/>
           </a:p>
@@ -1957,7 +2315,7 @@
           <a:p>
             <a:fld id="{5BCAD085-E8A6-8845-BD4E-CB4CCA059FC4}" type="datetimeFigureOut">
               <a:rPr lang="en-US" smtClean="0"/>
-              <a:t>10/12/2026</a:t>
+              <a:t>10/17/2026</a:t>
             </a:fld>
             <a:endParaRPr lang="en-US"/>
           </a:p>
@@ -2052,7 +2410,7 @@
           <a:p>
             <a:fld id="{5BCAD085-E8A6-8845-BD4E-CB4CCA059FC4}" type="datetimeFigureOut">
               <a:rPr lang="en-US" smtClean="0"/>
-              <a:t>10/12/2026</a:t>
+              <a:t>10/17/2026</a:t>
             </a:fld>
             <a:endParaRPr lang="en-US"/>
           </a:p>
@@ -2327,7 +2685,7 @@
           <a:p>
             <a:fld id="{5BCAD085-E8A6-8845-BD4E-CB4CCA059FC4}" type="datetimeFigureOut">
               <a:rPr lang="en-US" smtClean="0"/>
-              <a:t>10/12/2026</a:t>
+              <a:t>10/17/2026</a:t>
             </a:fld>
             <a:endParaRPr lang="en-US"/>
           </a:p>
@@ -2579,7 +2937,7 @@
           <a:p>
             <a:fld id="{5BCAD085-E8A6-8845-BD4E-CB4CCA059FC4}" type="datetimeFigureOut">
               <a:rPr lang="en-US" smtClean="0"/>
-              <a:t>10/12/2026</a:t>
+              <a:t>10/17/2026</a:t>
             </a:fld>
             <a:endParaRPr lang="en-US"/>
           </a:p>
@@ -2790,7 +3148,7 @@
           <a:p>
             <a:fld id="{5BCAD085-E8A6-8845-BD4E-CB4CCA059FC4}" type="datetimeFigureOut">
               <a:rPr lang="en-US" smtClean="0"/>
-              <a:t>10/12/2026</a:t>
+              <a:t>10/17/2026</a:t>
             </a:fld>
             <a:endParaRPr lang="en-US"/>
           </a:p>
@@ -3301,7 +3659,7 @@
         <p:spPr>
           <a:xfrm>
             <a:off x="609600" y="3715642"/>
-            <a:ext cx="6762750" cy="342900"/>
+            <a:ext cx="6762750" cy="430887"/>
           </a:xfrm>
           <a:prstGeom prst="rect">
             <a:avLst/>
@@ -3316,7 +3674,7 @@
           <a:p>
             <a:pPr algn="l"/>
             <a:r>
-              <a:rPr sz="1650" b="0" i="0" u="none">
+              <a:rPr sz="2800" b="0" i="0" u="none">
                 <a:solidFill>
                   <a:srgbClr val="94A3B8"/>
                 </a:solidFill>
@@ -3589,7 +3947,7 @@
         <p:spPr>
           <a:xfrm>
             <a:off x="847725" y="3116460"/>
-            <a:ext cx="4905375" cy="276225"/>
+            <a:ext cx="4905375" cy="307777"/>
           </a:xfrm>
           <a:prstGeom prst="rect">
             <a:avLst/>
@@ -3604,7 +3962,7 @@
           <a:p>
             <a:pPr algn="l"/>
             <a:r>
-              <a:rPr sz="1350" b="0" i="0" u="none">
+              <a:rPr sz="2000" b="0" i="0" u="none">
                 <a:solidFill>
                   <a:srgbClr val="475569"/>
                 </a:solidFill>
@@ -3659,7 +4017,7 @@
         <p:spPr>
           <a:xfrm>
             <a:off x="847725" y="4478535"/>
-            <a:ext cx="4905375" cy="276225"/>
+            <a:ext cx="4905375" cy="276999"/>
           </a:xfrm>
           <a:prstGeom prst="rect">
             <a:avLst/>
@@ -3674,7 +4032,7 @@
           <a:p>
             <a:pPr algn="l"/>
             <a:r>
-              <a:rPr sz="1350" b="0" i="0" u="none">
+              <a:rPr b="0" i="0" u="none">
                 <a:solidFill>
                   <a:srgbClr val="475569"/>
                 </a:solidFill>
@@ -3947,7 +4305,7 @@
         <p:spPr>
           <a:xfrm>
             <a:off x="6534150" y="3116460"/>
-            <a:ext cx="4905375" cy="276225"/>
+            <a:ext cx="4905375" cy="738664"/>
           </a:xfrm>
           <a:prstGeom prst="rect">
             <a:avLst/>
@@ -3962,7 +4320,7 @@
           <a:p>
             <a:pPr algn="l"/>
             <a:r>
-              <a:rPr sz="1350" b="0" i="0" u="none">
+              <a:rPr sz="2400" b="0" i="0" u="none">
                 <a:solidFill>
                   <a:srgbClr val="475569"/>
                 </a:solidFill>
@@ -4017,7 +4375,7 @@
         <p:spPr>
           <a:xfrm>
             <a:off x="6534150" y="4478535"/>
-            <a:ext cx="4905375" cy="276225"/>
+            <a:ext cx="4905375" cy="615553"/>
           </a:xfrm>
           <a:prstGeom prst="rect">
             <a:avLst/>
@@ -4032,7 +4390,7 @@
           <a:p>
             <a:pPr algn="l"/>
             <a:r>
-              <a:rPr sz="1350" b="0" i="0" u="none">
+              <a:rPr sz="2000" b="0" i="0" u="none">
                 <a:solidFill>
                   <a:srgbClr val="475569"/>
                 </a:solidFill>
@@ -4335,7 +4693,7 @@
         <p:spPr>
           <a:xfrm>
             <a:off x="847725" y="3116460"/>
-            <a:ext cx="4905375" cy="276225"/>
+            <a:ext cx="4905375" cy="615553"/>
           </a:xfrm>
           <a:prstGeom prst="rect">
             <a:avLst/>
@@ -4350,7 +4708,7 @@
           <a:p>
             <a:pPr algn="l"/>
             <a:r>
-              <a:rPr sz="1350" b="0" i="0" u="none">
+              <a:rPr sz="2000" b="0" i="0" u="none">
                 <a:solidFill>
                   <a:srgbClr val="475569"/>
                 </a:solidFill>
@@ -4405,7 +4763,7 @@
         <p:spPr>
           <a:xfrm>
             <a:off x="847725" y="4478535"/>
-            <a:ext cx="4905375" cy="276225"/>
+            <a:ext cx="4905375" cy="307777"/>
           </a:xfrm>
           <a:prstGeom prst="rect">
             <a:avLst/>
@@ -4420,7 +4778,7 @@
           <a:p>
             <a:pPr algn="l"/>
             <a:r>
-              <a:rPr sz="1350" b="0" i="0" u="none">
+              <a:rPr sz="2000" b="0" i="0" u="none">
                 <a:solidFill>
                   <a:srgbClr val="475569"/>
                 </a:solidFill>
@@ -4693,7 +5051,7 @@
         <p:spPr>
           <a:xfrm>
             <a:off x="6534150" y="3116460"/>
-            <a:ext cx="4905375" cy="276225"/>
+            <a:ext cx="4905375" cy="307777"/>
           </a:xfrm>
           <a:prstGeom prst="rect">
             <a:avLst/>
@@ -4708,7 +5066,7 @@
           <a:p>
             <a:pPr algn="l"/>
             <a:r>
-              <a:rPr sz="1350" b="0" i="0" u="none">
+              <a:rPr sz="2000" b="0" i="0" u="none">
                 <a:solidFill>
                   <a:srgbClr val="475569"/>
                 </a:solidFill>
@@ -4763,7 +5121,7 @@
         <p:spPr>
           <a:xfrm>
             <a:off x="6534150" y="4478535"/>
-            <a:ext cx="4905375" cy="276225"/>
+            <a:ext cx="4905375" cy="307777"/>
           </a:xfrm>
           <a:prstGeom prst="rect">
             <a:avLst/>
@@ -4778,7 +5136,7 @@
           <a:p>
             <a:pPr algn="l"/>
             <a:r>
-              <a:rPr sz="1350" b="0" i="0" u="none">
+              <a:rPr sz="2000" b="0" i="0" u="none">
                 <a:solidFill>
                   <a:srgbClr val="475569"/>
                 </a:solidFill>
@@ -5051,7 +5409,7 @@
         <p:spPr>
           <a:xfrm>
             <a:off x="847725" y="3116460"/>
-            <a:ext cx="4905375" cy="276225"/>
+            <a:ext cx="4905375" cy="615553"/>
           </a:xfrm>
           <a:prstGeom prst="rect">
             <a:avLst/>
@@ -5066,7 +5424,7 @@
           <a:p>
             <a:pPr algn="l"/>
             <a:r>
-              <a:rPr sz="1350" b="0" i="0" u="none">
+              <a:rPr sz="2000" b="0" i="0" u="none">
                 <a:solidFill>
                   <a:srgbClr val="475569"/>
                 </a:solidFill>
@@ -5121,7 +5479,7 @@
         <p:spPr>
           <a:xfrm>
             <a:off x="847725" y="4478535"/>
-            <a:ext cx="4905375" cy="276225"/>
+            <a:ext cx="4905375" cy="615553"/>
           </a:xfrm>
           <a:prstGeom prst="rect">
             <a:avLst/>
@@ -5136,2582 +5494,13 @@
           <a:p>
             <a:pPr algn="l"/>
             <a:r>
-              <a:rPr sz="1350" b="0" i="0" u="none">
+              <a:rPr sz="2000" b="0" i="0" u="none">
                 <a:solidFill>
                   <a:srgbClr val="475569"/>
                 </a:solidFill>
                 <a:latin typeface="Hind Siliguri"/>
               </a:rPr>
               <a:t>গান শোনা, ভিডিও দেখা, গেম খেলা এবং মিটিং শোনার জন্য আবশ্যক।</a:t>
-            </a:r>
-          </a:p>
-        </p:txBody>
-      </p:sp>
-    </p:spTree>
-  </p:cSld>
-  <p:clrMapOvr>
-    <a:masterClrMapping/>
-  </p:clrMapOvr>
-</p:sld>
-</file>
-
-<file path=ppt/slides/slide15.xml><?xml version="1.0" encoding="utf-8"?>
-<p:sld xmlns:a="http://schemas.openxmlformats.org/drawingml/2006/main" xmlns:r="http://schemas.openxmlformats.org/officeDocument/2006/relationships" xmlns:p="http://schemas.openxmlformats.org/presentationml/2006/main">
-  <p:cSld>
-    <p:bg>
-      <p:bgPr>
-        <a:solidFill>
-          <a:srgbClr val="0F172A"/>
-        </a:solidFill>
-        <a:effectLst/>
-      </p:bgPr>
-    </p:bg>
-    <p:spTree>
-      <p:nvGrpSpPr>
-        <p:cNvPr id="1" name=""/>
-        <p:cNvGrpSpPr/>
-        <p:nvPr/>
-      </p:nvGrpSpPr>
-      <p:grpSpPr>
-        <a:xfrm>
-          <a:off x="0" y="0"/>
-          <a:ext cx="0" cy="0"/>
-          <a:chOff x="0" y="0"/>
-          <a:chExt cx="0" cy="0"/>
-        </a:xfrm>
-      </p:grpSpPr>
-      <p:sp>
-        <p:nvSpPr>
-          <p:cNvPr id="2" name="TextBox 1"/>
-          <p:cNvSpPr txBox="1"/>
-          <p:nvPr/>
-        </p:nvSpPr>
-        <p:spPr>
-          <a:xfrm>
-            <a:off x="5252144" y="2828925"/>
-            <a:ext cx="1687710" cy="742950"/>
-          </a:xfrm>
-          <a:prstGeom prst="rect">
-            <a:avLst/>
-          </a:prstGeom>
-          <a:noFill/>
-        </p:spPr>
-        <p:txBody>
-          <a:bodyPr wrap="square" lIns="0" tIns="0" rIns="0" bIns="0" anchor="t">
-            <a:spAutoFit/>
-          </a:bodyPr>
-          <a:lstStyle/>
-          <a:p>
-            <a:pPr algn="ctr"/>
-            <a:r>
-              <a:rPr sz="3600" b="1" i="0" u="none">
-                <a:solidFill>
-                  <a:srgbClr val="FFFFFF"/>
-                </a:solidFill>
-                <a:latin typeface="Hind Siliguri"/>
-              </a:rPr>
-              <a:t>ধন্যবাদ</a:t>
-            </a:r>
-          </a:p>
-        </p:txBody>
-      </p:sp>
-      <p:sp>
-        <p:nvSpPr>
-          <p:cNvPr id="3" name="TextBox 2"/>
-          <p:cNvSpPr txBox="1"/>
-          <p:nvPr/>
-        </p:nvSpPr>
-        <p:spPr>
-          <a:xfrm>
-            <a:off x="2744390" y="3724275"/>
-            <a:ext cx="6703218" cy="304800"/>
-          </a:xfrm>
-          <a:prstGeom prst="rect">
-            <a:avLst/>
-          </a:prstGeom>
-          <a:noFill/>
-        </p:spPr>
-        <p:txBody>
-          <a:bodyPr wrap="square" lIns="0" tIns="0" rIns="0" bIns="0" anchor="t">
-            <a:spAutoFit/>
-          </a:bodyPr>
-          <a:lstStyle/>
-          <a:p>
-            <a:pPr algn="ctr"/>
-            <a:r>
-              <a:rPr sz="1500" b="0" i="0" u="none">
-                <a:solidFill>
-                  <a:srgbClr val="94A3B8"/>
-                </a:solidFill>
-                <a:latin typeface="Hind Siliguri"/>
-              </a:rPr>
-              <a:t>সপ্তম শ্রেণির তথ্য ও যোগাযোগ প্রযুক্তি পাঠের কম্পিউটার যন্ত্রাংশ অধ্যায় সমাপ্ত</a:t>
-            </a:r>
-          </a:p>
-        </p:txBody>
-      </p:sp>
-    </p:spTree>
-  </p:cSld>
-  <p:clrMapOvr>
-    <a:masterClrMapping/>
-  </p:clrMapOvr>
-</p:sld>
-</file>
-
-<file path=ppt/slides/slide16.xml><?xml version="1.0" encoding="utf-8"?>
-<p:sld xmlns:a="http://schemas.openxmlformats.org/drawingml/2006/main" xmlns:r="http://schemas.openxmlformats.org/officeDocument/2006/relationships" xmlns:p="http://schemas.openxmlformats.org/presentationml/2006/main">
-  <p:cSld>
-    <p:bg>
-      <p:bgPr>
-        <a:solidFill>
-          <a:srgbClr val="FFFFFF"/>
-        </a:solidFill>
-        <a:effectLst/>
-      </p:bgPr>
-    </p:bg>
-    <p:spTree>
-      <p:nvGrpSpPr>
-        <p:cNvPr id="1" name=""/>
-        <p:cNvGrpSpPr/>
-        <p:nvPr/>
-      </p:nvGrpSpPr>
-      <p:grpSpPr>
-        <a:xfrm>
-          <a:off x="0" y="0"/>
-          <a:ext cx="0" cy="0"/>
-          <a:chOff x="0" y="0"/>
-          <a:chExt cx="0" cy="0"/>
-        </a:xfrm>
-      </p:grpSpPr>
-      <p:sp>
-        <p:nvSpPr>
-          <p:cNvPr id="2" name="Rectangle 1"/>
-          <p:cNvSpPr/>
-          <p:nvPr/>
-        </p:nvSpPr>
-        <p:spPr>
-          <a:xfrm>
-            <a:off x="571500" y="942975"/>
-            <a:ext cx="11049000" cy="800100"/>
-          </a:xfrm>
-          <a:prstGeom prst="rect">
-            <a:avLst/>
-          </a:prstGeom>
-          <a:noFill/>
-          <a:ln>
-            <a:noFill/>
-          </a:ln>
-          <a:effectLst/>
-        </p:spPr>
-        <p:style>
-          <a:lnRef idx="1">
-            <a:schemeClr val="accent1"/>
-          </a:lnRef>
-          <a:fillRef idx="3">
-            <a:schemeClr val="accent1"/>
-          </a:fillRef>
-          <a:effectRef idx="2">
-            <a:schemeClr val="accent1"/>
-          </a:effectRef>
-          <a:fontRef idx="minor">
-            <a:schemeClr val="lt1"/>
-          </a:fontRef>
-        </p:style>
-        <p:txBody>
-          <a:bodyPr rtlCol="0" anchor="ctr"/>
-          <a:lstStyle/>
-          <a:p>
-            <a:pPr algn="ctr"/>
-            <a:endParaRPr/>
-          </a:p>
-        </p:txBody>
-      </p:sp>
-      <p:sp>
-        <p:nvSpPr>
-          <p:cNvPr id="3" name="Rectangle 2"/>
-          <p:cNvSpPr/>
-          <p:nvPr/>
-        </p:nvSpPr>
-        <p:spPr>
-          <a:xfrm>
-            <a:off x="571500" y="1743075"/>
-            <a:ext cx="11049000" cy="800100"/>
-          </a:xfrm>
-          <a:prstGeom prst="rect">
-            <a:avLst/>
-          </a:prstGeom>
-          <a:noFill/>
-          <a:ln>
-            <a:noFill/>
-          </a:ln>
-          <a:effectLst/>
-        </p:spPr>
-        <p:style>
-          <a:lnRef idx="1">
-            <a:schemeClr val="accent1"/>
-          </a:lnRef>
-          <a:fillRef idx="3">
-            <a:schemeClr val="accent1"/>
-          </a:fillRef>
-          <a:effectRef idx="2">
-            <a:schemeClr val="accent1"/>
-          </a:effectRef>
-          <a:fontRef idx="minor">
-            <a:schemeClr val="lt1"/>
-          </a:fontRef>
-        </p:style>
-        <p:txBody>
-          <a:bodyPr rtlCol="0" anchor="ctr"/>
-          <a:lstStyle/>
-          <a:p>
-            <a:pPr algn="ctr"/>
-            <a:endParaRPr/>
-          </a:p>
-        </p:txBody>
-      </p:sp>
-      <p:sp>
-        <p:nvSpPr>
-          <p:cNvPr id="4" name="Rectangle 3"/>
-          <p:cNvSpPr/>
-          <p:nvPr/>
-        </p:nvSpPr>
-        <p:spPr>
-          <a:xfrm>
-            <a:off x="571500" y="2543175"/>
-            <a:ext cx="11049000" cy="800100"/>
-          </a:xfrm>
-          <a:prstGeom prst="rect">
-            <a:avLst/>
-          </a:prstGeom>
-          <a:noFill/>
-          <a:ln>
-            <a:noFill/>
-          </a:ln>
-          <a:effectLst/>
-        </p:spPr>
-        <p:style>
-          <a:lnRef idx="1">
-            <a:schemeClr val="accent1"/>
-          </a:lnRef>
-          <a:fillRef idx="3">
-            <a:schemeClr val="accent1"/>
-          </a:fillRef>
-          <a:effectRef idx="2">
-            <a:schemeClr val="accent1"/>
-          </a:effectRef>
-          <a:fontRef idx="minor">
-            <a:schemeClr val="lt1"/>
-          </a:fontRef>
-        </p:style>
-        <p:txBody>
-          <a:bodyPr rtlCol="0" anchor="ctr"/>
-          <a:lstStyle/>
-          <a:p>
-            <a:pPr algn="ctr"/>
-            <a:endParaRPr/>
-          </a:p>
-        </p:txBody>
-      </p:sp>
-      <p:sp>
-        <p:nvSpPr>
-          <p:cNvPr id="5" name="Rectangle 4"/>
-          <p:cNvSpPr/>
-          <p:nvPr/>
-        </p:nvSpPr>
-        <p:spPr>
-          <a:xfrm>
-            <a:off x="571500" y="3343275"/>
-            <a:ext cx="11049000" cy="1009650"/>
-          </a:xfrm>
-          <a:prstGeom prst="rect">
-            <a:avLst/>
-          </a:prstGeom>
-          <a:noFill/>
-          <a:ln>
-            <a:noFill/>
-          </a:ln>
-          <a:effectLst/>
-        </p:spPr>
-        <p:style>
-          <a:lnRef idx="1">
-            <a:schemeClr val="accent1"/>
-          </a:lnRef>
-          <a:fillRef idx="3">
-            <a:schemeClr val="accent1"/>
-          </a:fillRef>
-          <a:effectRef idx="2">
-            <a:schemeClr val="accent1"/>
-          </a:effectRef>
-          <a:fontRef idx="minor">
-            <a:schemeClr val="lt1"/>
-          </a:fontRef>
-        </p:style>
-        <p:txBody>
-          <a:bodyPr rtlCol="0" anchor="ctr"/>
-          <a:lstStyle/>
-          <a:p>
-            <a:pPr algn="ctr"/>
-            <a:endParaRPr/>
-          </a:p>
-        </p:txBody>
-      </p:sp>
-      <p:sp>
-        <p:nvSpPr>
-          <p:cNvPr id="6" name="Rectangle 5"/>
-          <p:cNvSpPr/>
-          <p:nvPr/>
-        </p:nvSpPr>
-        <p:spPr>
-          <a:xfrm>
-            <a:off x="571500" y="4352925"/>
-            <a:ext cx="11049000" cy="800100"/>
-          </a:xfrm>
-          <a:prstGeom prst="rect">
-            <a:avLst/>
-          </a:prstGeom>
-          <a:noFill/>
-          <a:ln>
-            <a:noFill/>
-          </a:ln>
-          <a:effectLst/>
-        </p:spPr>
-        <p:style>
-          <a:lnRef idx="1">
-            <a:schemeClr val="accent1"/>
-          </a:lnRef>
-          <a:fillRef idx="3">
-            <a:schemeClr val="accent1"/>
-          </a:fillRef>
-          <a:effectRef idx="2">
-            <a:schemeClr val="accent1"/>
-          </a:effectRef>
-          <a:fontRef idx="minor">
-            <a:schemeClr val="lt1"/>
-          </a:fontRef>
-        </p:style>
-        <p:txBody>
-          <a:bodyPr rtlCol="0" anchor="ctr"/>
-          <a:lstStyle/>
-          <a:p>
-            <a:pPr algn="ctr"/>
-            <a:endParaRPr/>
-          </a:p>
-        </p:txBody>
-      </p:sp>
-      <p:sp>
-        <p:nvSpPr>
-          <p:cNvPr id="7" name="Rectangle 6"/>
-          <p:cNvSpPr/>
-          <p:nvPr/>
-        </p:nvSpPr>
-        <p:spPr>
-          <a:xfrm>
-            <a:off x="571500" y="1733550"/>
-            <a:ext cx="11049000" cy="9525"/>
-          </a:xfrm>
-          <a:prstGeom prst="rect">
-            <a:avLst/>
-          </a:prstGeom>
-          <a:solidFill>
-            <a:srgbClr val="757575"/>
-          </a:solidFill>
-          <a:ln>
-            <a:noFill/>
-          </a:ln>
-          <a:effectLst/>
-        </p:spPr>
-        <p:style>
-          <a:lnRef idx="1">
-            <a:schemeClr val="accent1"/>
-          </a:lnRef>
-          <a:fillRef idx="3">
-            <a:schemeClr val="accent1"/>
-          </a:fillRef>
-          <a:effectRef idx="2">
-            <a:schemeClr val="accent1"/>
-          </a:effectRef>
-          <a:fontRef idx="minor">
-            <a:schemeClr val="lt1"/>
-          </a:fontRef>
-        </p:style>
-        <p:txBody>
-          <a:bodyPr rtlCol="0" anchor="ctr"/>
-          <a:lstStyle/>
-          <a:p>
-            <a:pPr algn="ctr"/>
-            <a:endParaRPr/>
-          </a:p>
-        </p:txBody>
-      </p:sp>
-      <p:sp>
-        <p:nvSpPr>
-          <p:cNvPr id="8" name="Rectangle 7"/>
-          <p:cNvSpPr/>
-          <p:nvPr/>
-        </p:nvSpPr>
-        <p:spPr>
-          <a:xfrm>
-            <a:off x="571500" y="1733550"/>
-            <a:ext cx="11049000" cy="9525"/>
-          </a:xfrm>
-          <a:prstGeom prst="rect">
-            <a:avLst/>
-          </a:prstGeom>
-          <a:solidFill>
-            <a:srgbClr val="757575"/>
-          </a:solidFill>
-          <a:ln>
-            <a:noFill/>
-          </a:ln>
-          <a:effectLst/>
-        </p:spPr>
-        <p:style>
-          <a:lnRef idx="1">
-            <a:schemeClr val="accent1"/>
-          </a:lnRef>
-          <a:fillRef idx="3">
-            <a:schemeClr val="accent1"/>
-          </a:fillRef>
-          <a:effectRef idx="2">
-            <a:schemeClr val="accent1"/>
-          </a:effectRef>
-          <a:fontRef idx="minor">
-            <a:schemeClr val="lt1"/>
-          </a:fontRef>
-        </p:style>
-        <p:txBody>
-          <a:bodyPr rtlCol="0" anchor="ctr"/>
-          <a:lstStyle/>
-          <a:p>
-            <a:pPr algn="ctr"/>
-            <a:endParaRPr/>
-          </a:p>
-        </p:txBody>
-      </p:sp>
-      <p:sp>
-        <p:nvSpPr>
-          <p:cNvPr id="9" name="Rectangle 8"/>
-          <p:cNvSpPr/>
-          <p:nvPr/>
-        </p:nvSpPr>
-        <p:spPr>
-          <a:xfrm>
-            <a:off x="571500" y="2533650"/>
-            <a:ext cx="11049000" cy="9525"/>
-          </a:xfrm>
-          <a:prstGeom prst="rect">
-            <a:avLst/>
-          </a:prstGeom>
-          <a:solidFill>
-            <a:srgbClr val="757575"/>
-          </a:solidFill>
-          <a:ln>
-            <a:noFill/>
-          </a:ln>
-          <a:effectLst/>
-        </p:spPr>
-        <p:style>
-          <a:lnRef idx="1">
-            <a:schemeClr val="accent1"/>
-          </a:lnRef>
-          <a:fillRef idx="3">
-            <a:schemeClr val="accent1"/>
-          </a:fillRef>
-          <a:effectRef idx="2">
-            <a:schemeClr val="accent1"/>
-          </a:effectRef>
-          <a:fontRef idx="minor">
-            <a:schemeClr val="lt1"/>
-          </a:fontRef>
-        </p:style>
-        <p:txBody>
-          <a:bodyPr rtlCol="0" anchor="ctr"/>
-          <a:lstStyle/>
-          <a:p>
-            <a:pPr algn="ctr"/>
-            <a:endParaRPr/>
-          </a:p>
-        </p:txBody>
-      </p:sp>
-      <p:sp>
-        <p:nvSpPr>
-          <p:cNvPr id="10" name="Rectangle 9"/>
-          <p:cNvSpPr/>
-          <p:nvPr/>
-        </p:nvSpPr>
-        <p:spPr>
-          <a:xfrm>
-            <a:off x="571500" y="2533650"/>
-            <a:ext cx="11049000" cy="9525"/>
-          </a:xfrm>
-          <a:prstGeom prst="rect">
-            <a:avLst/>
-          </a:prstGeom>
-          <a:solidFill>
-            <a:srgbClr val="757575"/>
-          </a:solidFill>
-          <a:ln>
-            <a:noFill/>
-          </a:ln>
-          <a:effectLst/>
-        </p:spPr>
-        <p:style>
-          <a:lnRef idx="1">
-            <a:schemeClr val="accent1"/>
-          </a:lnRef>
-          <a:fillRef idx="3">
-            <a:schemeClr val="accent1"/>
-          </a:fillRef>
-          <a:effectRef idx="2">
-            <a:schemeClr val="accent1"/>
-          </a:effectRef>
-          <a:fontRef idx="minor">
-            <a:schemeClr val="lt1"/>
-          </a:fontRef>
-        </p:style>
-        <p:txBody>
-          <a:bodyPr rtlCol="0" anchor="ctr"/>
-          <a:lstStyle/>
-          <a:p>
-            <a:pPr algn="ctr"/>
-            <a:endParaRPr/>
-          </a:p>
-        </p:txBody>
-      </p:sp>
-      <p:sp>
-        <p:nvSpPr>
-          <p:cNvPr id="11" name="Rectangle 10"/>
-          <p:cNvSpPr/>
-          <p:nvPr/>
-        </p:nvSpPr>
-        <p:spPr>
-          <a:xfrm>
-            <a:off x="571500" y="3333750"/>
-            <a:ext cx="11049000" cy="9525"/>
-          </a:xfrm>
-          <a:prstGeom prst="rect">
-            <a:avLst/>
-          </a:prstGeom>
-          <a:solidFill>
-            <a:srgbClr val="757575"/>
-          </a:solidFill>
-          <a:ln>
-            <a:noFill/>
-          </a:ln>
-          <a:effectLst/>
-        </p:spPr>
-        <p:style>
-          <a:lnRef idx="1">
-            <a:schemeClr val="accent1"/>
-          </a:lnRef>
-          <a:fillRef idx="3">
-            <a:schemeClr val="accent1"/>
-          </a:fillRef>
-          <a:effectRef idx="2">
-            <a:schemeClr val="accent1"/>
-          </a:effectRef>
-          <a:fontRef idx="minor">
-            <a:schemeClr val="lt1"/>
-          </a:fontRef>
-        </p:style>
-        <p:txBody>
-          <a:bodyPr rtlCol="0" anchor="ctr"/>
-          <a:lstStyle/>
-          <a:p>
-            <a:pPr algn="ctr"/>
-            <a:endParaRPr/>
-          </a:p>
-        </p:txBody>
-      </p:sp>
-      <p:sp>
-        <p:nvSpPr>
-          <p:cNvPr id="12" name="Rectangle 11"/>
-          <p:cNvSpPr/>
-          <p:nvPr/>
-        </p:nvSpPr>
-        <p:spPr>
-          <a:xfrm>
-            <a:off x="571500" y="3333750"/>
-            <a:ext cx="11049000" cy="9525"/>
-          </a:xfrm>
-          <a:prstGeom prst="rect">
-            <a:avLst/>
-          </a:prstGeom>
-          <a:solidFill>
-            <a:srgbClr val="757575"/>
-          </a:solidFill>
-          <a:ln>
-            <a:noFill/>
-          </a:ln>
-          <a:effectLst/>
-        </p:spPr>
-        <p:style>
-          <a:lnRef idx="1">
-            <a:schemeClr val="accent1"/>
-          </a:lnRef>
-          <a:fillRef idx="3">
-            <a:schemeClr val="accent1"/>
-          </a:fillRef>
-          <a:effectRef idx="2">
-            <a:schemeClr val="accent1"/>
-          </a:effectRef>
-          <a:fontRef idx="minor">
-            <a:schemeClr val="lt1"/>
-          </a:fontRef>
-        </p:style>
-        <p:txBody>
-          <a:bodyPr rtlCol="0" anchor="ctr"/>
-          <a:lstStyle/>
-          <a:p>
-            <a:pPr algn="ctr"/>
-            <a:endParaRPr/>
-          </a:p>
-        </p:txBody>
-      </p:sp>
-      <p:sp>
-        <p:nvSpPr>
-          <p:cNvPr id="13" name="Rectangle 12"/>
-          <p:cNvSpPr/>
-          <p:nvPr/>
-        </p:nvSpPr>
-        <p:spPr>
-          <a:xfrm>
-            <a:off x="571500" y="4343400"/>
-            <a:ext cx="11049000" cy="9525"/>
-          </a:xfrm>
-          <a:prstGeom prst="rect">
-            <a:avLst/>
-          </a:prstGeom>
-          <a:solidFill>
-            <a:srgbClr val="757575"/>
-          </a:solidFill>
-          <a:ln>
-            <a:noFill/>
-          </a:ln>
-          <a:effectLst/>
-        </p:spPr>
-        <p:style>
-          <a:lnRef idx="1">
-            <a:schemeClr val="accent1"/>
-          </a:lnRef>
-          <a:fillRef idx="3">
-            <a:schemeClr val="accent1"/>
-          </a:fillRef>
-          <a:effectRef idx="2">
-            <a:schemeClr val="accent1"/>
-          </a:effectRef>
-          <a:fontRef idx="minor">
-            <a:schemeClr val="lt1"/>
-          </a:fontRef>
-        </p:style>
-        <p:txBody>
-          <a:bodyPr rtlCol="0" anchor="ctr"/>
-          <a:lstStyle/>
-          <a:p>
-            <a:pPr algn="ctr"/>
-            <a:endParaRPr/>
-          </a:p>
-        </p:txBody>
-      </p:sp>
-      <p:sp>
-        <p:nvSpPr>
-          <p:cNvPr id="14" name="Rectangle 13"/>
-          <p:cNvSpPr/>
-          <p:nvPr/>
-        </p:nvSpPr>
-        <p:spPr>
-          <a:xfrm>
-            <a:off x="571500" y="4343400"/>
-            <a:ext cx="11049000" cy="9525"/>
-          </a:xfrm>
-          <a:prstGeom prst="rect">
-            <a:avLst/>
-          </a:prstGeom>
-          <a:solidFill>
-            <a:srgbClr val="757575"/>
-          </a:solidFill>
-          <a:ln>
-            <a:noFill/>
-          </a:ln>
-          <a:effectLst/>
-        </p:spPr>
-        <p:style>
-          <a:lnRef idx="1">
-            <a:schemeClr val="accent1"/>
-          </a:lnRef>
-          <a:fillRef idx="3">
-            <a:schemeClr val="accent1"/>
-          </a:fillRef>
-          <a:effectRef idx="2">
-            <a:schemeClr val="accent1"/>
-          </a:effectRef>
-          <a:fontRef idx="minor">
-            <a:schemeClr val="lt1"/>
-          </a:fontRef>
-        </p:style>
-        <p:txBody>
-          <a:bodyPr rtlCol="0" anchor="ctr"/>
-          <a:lstStyle/>
-          <a:p>
-            <a:pPr algn="ctr"/>
-            <a:endParaRPr/>
-          </a:p>
-        </p:txBody>
-      </p:sp>
-      <p:sp>
-        <p:nvSpPr>
-          <p:cNvPr id="15" name="Rectangle 14"/>
-          <p:cNvSpPr/>
-          <p:nvPr/>
-        </p:nvSpPr>
-        <p:spPr>
-          <a:xfrm>
-            <a:off x="571500" y="5143500"/>
-            <a:ext cx="11049000" cy="9525"/>
-          </a:xfrm>
-          <a:prstGeom prst="rect">
-            <a:avLst/>
-          </a:prstGeom>
-          <a:solidFill>
-            <a:srgbClr val="757575"/>
-          </a:solidFill>
-          <a:ln>
-            <a:noFill/>
-          </a:ln>
-          <a:effectLst/>
-        </p:spPr>
-        <p:style>
-          <a:lnRef idx="1">
-            <a:schemeClr val="accent1"/>
-          </a:lnRef>
-          <a:fillRef idx="3">
-            <a:schemeClr val="accent1"/>
-          </a:fillRef>
-          <a:effectRef idx="2">
-            <a:schemeClr val="accent1"/>
-          </a:effectRef>
-          <a:fontRef idx="minor">
-            <a:schemeClr val="lt1"/>
-          </a:fontRef>
-        </p:style>
-        <p:txBody>
-          <a:bodyPr rtlCol="0" anchor="ctr"/>
-          <a:lstStyle/>
-          <a:p>
-            <a:pPr algn="ctr"/>
-            <a:endParaRPr/>
-          </a:p>
-        </p:txBody>
-      </p:sp>
-      <p:sp>
-        <p:nvSpPr>
-          <p:cNvPr id="16" name="Rectangle 15"/>
-          <p:cNvSpPr/>
-          <p:nvPr/>
-        </p:nvSpPr>
-        <p:spPr>
-          <a:xfrm>
-            <a:off x="571500" y="5143500"/>
-            <a:ext cx="11049000" cy="9525"/>
-          </a:xfrm>
-          <a:prstGeom prst="rect">
-            <a:avLst/>
-          </a:prstGeom>
-          <a:solidFill>
-            <a:srgbClr val="757575"/>
-          </a:solidFill>
-          <a:ln>
-            <a:noFill/>
-          </a:ln>
-          <a:effectLst/>
-        </p:spPr>
-        <p:style>
-          <a:lnRef idx="1">
-            <a:schemeClr val="accent1"/>
-          </a:lnRef>
-          <a:fillRef idx="3">
-            <a:schemeClr val="accent1"/>
-          </a:fillRef>
-          <a:effectRef idx="2">
-            <a:schemeClr val="accent1"/>
-          </a:effectRef>
-          <a:fontRef idx="minor">
-            <a:schemeClr val="lt1"/>
-          </a:fontRef>
-        </p:style>
-        <p:txBody>
-          <a:bodyPr rtlCol="0" anchor="ctr"/>
-          <a:lstStyle/>
-          <a:p>
-            <a:pPr algn="ctr"/>
-            <a:endParaRPr/>
-          </a:p>
-        </p:txBody>
-      </p:sp>
-      <p:pic>
-        <p:nvPicPr>
-          <p:cNvPr id="17" name="Picture 16" descr="image.png"/>
-          <p:cNvPicPr>
-            <a:picLocks noChangeAspect="1"/>
-          </p:cNvPicPr>
-          <p:nvPr/>
-        </p:nvPicPr>
-        <p:blipFill>
-          <a:blip r:embed="rId2"/>
-          <a:stretch>
-            <a:fillRect/>
-          </a:stretch>
-        </p:blipFill>
-        <p:spPr>
-          <a:xfrm>
-            <a:off x="571500" y="1100137"/>
-            <a:ext cx="857250" cy="476250"/>
-          </a:xfrm>
-          <a:prstGeom prst="rect">
-            <a:avLst/>
-          </a:prstGeom>
-        </p:spPr>
-      </p:pic>
-      <p:pic>
-        <p:nvPicPr>
-          <p:cNvPr id="18" name="Picture 17" descr="image.png"/>
-          <p:cNvPicPr>
-            <a:picLocks noChangeAspect="1"/>
-          </p:cNvPicPr>
-          <p:nvPr/>
-        </p:nvPicPr>
-        <p:blipFill>
-          <a:blip r:embed="rId3"/>
-          <a:stretch>
-            <a:fillRect/>
-          </a:stretch>
-        </p:blipFill>
-        <p:spPr>
-          <a:xfrm>
-            <a:off x="571500" y="1900237"/>
-            <a:ext cx="857250" cy="476250"/>
-          </a:xfrm>
-          <a:prstGeom prst="rect">
-            <a:avLst/>
-          </a:prstGeom>
-        </p:spPr>
-      </p:pic>
-      <p:pic>
-        <p:nvPicPr>
-          <p:cNvPr id="19" name="Picture 18" descr="image.png"/>
-          <p:cNvPicPr>
-            <a:picLocks noChangeAspect="1"/>
-          </p:cNvPicPr>
-          <p:nvPr/>
-        </p:nvPicPr>
-        <p:blipFill>
-          <a:blip r:embed="rId4"/>
-          <a:stretch>
-            <a:fillRect/>
-          </a:stretch>
-        </p:blipFill>
-        <p:spPr>
-          <a:xfrm>
-            <a:off x="571500" y="2700337"/>
-            <a:ext cx="857250" cy="476250"/>
-          </a:xfrm>
-          <a:prstGeom prst="rect">
-            <a:avLst/>
-          </a:prstGeom>
-        </p:spPr>
-      </p:pic>
-      <p:pic>
-        <p:nvPicPr>
-          <p:cNvPr id="20" name="Picture 19" descr="image.png"/>
-          <p:cNvPicPr>
-            <a:picLocks noChangeAspect="1"/>
-          </p:cNvPicPr>
-          <p:nvPr/>
-        </p:nvPicPr>
-        <p:blipFill>
-          <a:blip r:embed="rId5"/>
-          <a:stretch>
-            <a:fillRect/>
-          </a:stretch>
-        </p:blipFill>
-        <p:spPr>
-          <a:xfrm>
-            <a:off x="571500" y="3605212"/>
-            <a:ext cx="857250" cy="476250"/>
-          </a:xfrm>
-          <a:prstGeom prst="rect">
-            <a:avLst/>
-          </a:prstGeom>
-        </p:spPr>
-      </p:pic>
-      <p:pic>
-        <p:nvPicPr>
-          <p:cNvPr id="21" name="Picture 20" descr="image.png"/>
-          <p:cNvPicPr>
-            <a:picLocks noChangeAspect="1"/>
-          </p:cNvPicPr>
-          <p:nvPr/>
-        </p:nvPicPr>
-        <p:blipFill>
-          <a:blip r:embed="rId6"/>
-          <a:stretch>
-            <a:fillRect/>
-          </a:stretch>
-        </p:blipFill>
-        <p:spPr>
-          <a:xfrm>
-            <a:off x="571500" y="4510087"/>
-            <a:ext cx="857250" cy="476250"/>
-          </a:xfrm>
-          <a:prstGeom prst="rect">
-            <a:avLst/>
-          </a:prstGeom>
-        </p:spPr>
-      </p:pic>
-      <p:pic>
-        <p:nvPicPr>
-          <p:cNvPr id="22" name="Picture 21" descr="image.png"/>
-          <p:cNvPicPr>
-            <a:picLocks noChangeAspect="1"/>
-          </p:cNvPicPr>
-          <p:nvPr/>
-        </p:nvPicPr>
-        <p:blipFill>
-          <a:blip r:embed="rId7"/>
-          <a:stretch>
-            <a:fillRect/>
-          </a:stretch>
-        </p:blipFill>
-        <p:spPr>
-          <a:xfrm>
-            <a:off x="571500" y="5414962"/>
-            <a:ext cx="857250" cy="476250"/>
-          </a:xfrm>
-          <a:prstGeom prst="rect">
-            <a:avLst/>
-          </a:prstGeom>
-        </p:spPr>
-      </p:pic>
-      <p:sp>
-        <p:nvSpPr>
-          <p:cNvPr id="23" name="TextBox 22"/>
-          <p:cNvSpPr txBox="1"/>
-          <p:nvPr/>
-        </p:nvSpPr>
-        <p:spPr>
-          <a:xfrm>
-            <a:off x="571500" y="571500"/>
-            <a:ext cx="1660207" cy="371475"/>
-          </a:xfrm>
-          <a:prstGeom prst="rect">
-            <a:avLst/>
-          </a:prstGeom>
-          <a:noFill/>
-        </p:spPr>
-        <p:txBody>
-          <a:bodyPr wrap="square" lIns="0" tIns="0" rIns="0" bIns="0" anchor="t">
-            <a:spAutoFit/>
-          </a:bodyPr>
-          <a:lstStyle/>
-          <a:p>
-            <a:pPr algn="l"/>
-            <a:r>
-              <a:rPr sz="1800" b="1" i="0" u="none">
-                <a:solidFill>
-                  <a:srgbClr val="000000"/>
-                </a:solidFill>
-                <a:latin typeface="Hind Siliguri"/>
-              </a:rPr>
-              <a:t>Image Sources</a:t>
-            </a:r>
-          </a:p>
-        </p:txBody>
-      </p:sp>
-      <p:sp>
-        <p:nvSpPr>
-          <p:cNvPr id="24" name="TextBox 23"/>
-          <p:cNvSpPr txBox="1"/>
-          <p:nvPr/>
-        </p:nvSpPr>
-        <p:spPr>
-          <a:xfrm>
-            <a:off x="1666875" y="1085850"/>
-            <a:ext cx="4733925" cy="209550"/>
-          </a:xfrm>
-          <a:prstGeom prst="rect">
-            <a:avLst/>
-          </a:prstGeom>
-          <a:noFill/>
-        </p:spPr>
-        <p:txBody>
-          <a:bodyPr wrap="square" lIns="0" tIns="0" rIns="0" bIns="0" anchor="t">
-            <a:spAutoFit/>
-          </a:bodyPr>
-          <a:lstStyle/>
-          <a:p>
-            <a:pPr algn="l"/>
-            <a:r>
-              <a:rPr sz="975" b="0" i="0" u="none">
-                <a:solidFill>
-                  <a:srgbClr val="000000"/>
-                </a:solidFill>
-                <a:latin typeface="Hind Siliguri"/>
-              </a:rPr>
-              <a:t>https://jhiescrap.com/wp-content/uploads/2026/04/What-Are-the-30-Input-Devices.jpg</a:t>
-            </a:r>
-          </a:p>
-        </p:txBody>
-      </p:sp>
-      <p:sp>
-        <p:nvSpPr>
-          <p:cNvPr id="25" name="TextBox 24"/>
-          <p:cNvSpPr txBox="1"/>
-          <p:nvPr/>
-        </p:nvSpPr>
-        <p:spPr>
-          <a:xfrm>
-            <a:off x="1666875" y="1343025"/>
-            <a:ext cx="1524000" cy="247650"/>
-          </a:xfrm>
-          <a:prstGeom prst="rect">
-            <a:avLst/>
-          </a:prstGeom>
-          <a:noFill/>
-        </p:spPr>
-        <p:txBody>
-          <a:bodyPr wrap="square" lIns="0" tIns="0" rIns="0" bIns="0" anchor="t">
-            <a:spAutoFit/>
-          </a:bodyPr>
-          <a:lstStyle/>
-          <a:p>
-            <a:pPr algn="l"/>
-            <a:r>
-              <a:rPr sz="1200" b="0" i="0" u="none">
-                <a:solidFill>
-                  <a:srgbClr val="000000"/>
-                </a:solidFill>
-                <a:latin typeface="Hind Siliguri"/>
-              </a:rPr>
-              <a:t>Source: </a:t>
-            </a:r>
-            <a:r>
-              <a:rPr sz="1200" b="0" i="0" u="none">
-                <a:solidFill>
-                  <a:srgbClr val="4F46E5"/>
-                </a:solidFill>
-                <a:latin typeface="Hind Siliguri"/>
-              </a:rPr>
-              <a:t>jhiescrap.com</a:t>
-            </a:r>
-          </a:p>
-        </p:txBody>
-      </p:sp>
-      <p:sp>
-        <p:nvSpPr>
-          <p:cNvPr id="26" name="TextBox 25"/>
-          <p:cNvSpPr txBox="1"/>
-          <p:nvPr/>
-        </p:nvSpPr>
-        <p:spPr>
-          <a:xfrm>
-            <a:off x="1666875" y="1885950"/>
-            <a:ext cx="4457700" cy="209550"/>
-          </a:xfrm>
-          <a:prstGeom prst="rect">
-            <a:avLst/>
-          </a:prstGeom>
-          <a:noFill/>
-        </p:spPr>
-        <p:txBody>
-          <a:bodyPr wrap="square" lIns="0" tIns="0" rIns="0" bIns="0" anchor="t">
-            <a:spAutoFit/>
-          </a:bodyPr>
-          <a:lstStyle/>
-          <a:p>
-            <a:pPr algn="l"/>
-            <a:r>
-              <a:rPr sz="975" b="0" i="0" u="none">
-                <a:solidFill>
-                  <a:srgbClr val="000000"/>
-                </a:solidFill>
-                <a:latin typeface="Hind Siliguri"/>
-              </a:rPr>
-              <a:t>https://www.tutorialspoint.com/computer_fundamentals/images/wired_mouse.jpg</a:t>
-            </a:r>
-          </a:p>
-        </p:txBody>
-      </p:sp>
-      <p:sp>
-        <p:nvSpPr>
-          <p:cNvPr id="27" name="TextBox 26"/>
-          <p:cNvSpPr txBox="1"/>
-          <p:nvPr/>
-        </p:nvSpPr>
-        <p:spPr>
-          <a:xfrm>
-            <a:off x="1666875" y="2143125"/>
-            <a:ext cx="2238375" cy="247650"/>
-          </a:xfrm>
-          <a:prstGeom prst="rect">
-            <a:avLst/>
-          </a:prstGeom>
-          <a:noFill/>
-        </p:spPr>
-        <p:txBody>
-          <a:bodyPr wrap="square" lIns="0" tIns="0" rIns="0" bIns="0" anchor="t">
-            <a:spAutoFit/>
-          </a:bodyPr>
-          <a:lstStyle/>
-          <a:p>
-            <a:pPr algn="l"/>
-            <a:r>
-              <a:rPr sz="1200" b="0" i="0" u="none">
-                <a:solidFill>
-                  <a:srgbClr val="000000"/>
-                </a:solidFill>
-                <a:latin typeface="Hind Siliguri"/>
-              </a:rPr>
-              <a:t>Source: </a:t>
-            </a:r>
-            <a:r>
-              <a:rPr sz="1200" b="0" i="0" u="none">
-                <a:solidFill>
-                  <a:srgbClr val="4F46E5"/>
-                </a:solidFill>
-                <a:latin typeface="Hind Siliguri"/>
-              </a:rPr>
-              <a:t>www.tutorialspoint.com</a:t>
-            </a:r>
-          </a:p>
-        </p:txBody>
-      </p:sp>
-      <p:sp>
-        <p:nvSpPr>
-          <p:cNvPr id="28" name="TextBox 27"/>
-          <p:cNvSpPr txBox="1"/>
-          <p:nvPr/>
-        </p:nvSpPr>
-        <p:spPr>
-          <a:xfrm>
-            <a:off x="1666875" y="2686050"/>
-            <a:ext cx="8286750" cy="209550"/>
-          </a:xfrm>
-          <a:prstGeom prst="rect">
-            <a:avLst/>
-          </a:prstGeom>
-          <a:noFill/>
-        </p:spPr>
-        <p:txBody>
-          <a:bodyPr wrap="square" lIns="0" tIns="0" rIns="0" bIns="0" anchor="t">
-            <a:spAutoFit/>
-          </a:bodyPr>
-          <a:lstStyle/>
-          <a:p>
-            <a:pPr algn="l"/>
-            <a:r>
-              <a:rPr sz="975" b="0" i="0" u="none">
-                <a:solidFill>
-                  <a:srgbClr val="000000"/>
-                </a:solidFill>
-                <a:latin typeface="Hind Siliguri"/>
-              </a:rPr>
-              <a:t>https://static0.makeuseofimages.com/wordpress/wp-content/uploads/wm/2025/11/pc-analog-audio-jacks-on-back-of-desktop.jpg?w=1600&amp;h=1200&amp;fit=crop</a:t>
-            </a:r>
-          </a:p>
-        </p:txBody>
-      </p:sp>
-      <p:sp>
-        <p:nvSpPr>
-          <p:cNvPr id="29" name="TextBox 28"/>
-          <p:cNvSpPr txBox="1"/>
-          <p:nvPr/>
-        </p:nvSpPr>
-        <p:spPr>
-          <a:xfrm>
-            <a:off x="1666875" y="2943225"/>
-            <a:ext cx="2047875" cy="247650"/>
-          </a:xfrm>
-          <a:prstGeom prst="rect">
-            <a:avLst/>
-          </a:prstGeom>
-          <a:noFill/>
-        </p:spPr>
-        <p:txBody>
-          <a:bodyPr wrap="square" lIns="0" tIns="0" rIns="0" bIns="0" anchor="t">
-            <a:spAutoFit/>
-          </a:bodyPr>
-          <a:lstStyle/>
-          <a:p>
-            <a:pPr algn="l"/>
-            <a:r>
-              <a:rPr sz="1200" b="0" i="0" u="none">
-                <a:solidFill>
-                  <a:srgbClr val="000000"/>
-                </a:solidFill>
-                <a:latin typeface="Hind Siliguri"/>
-              </a:rPr>
-              <a:t>Source: </a:t>
-            </a:r>
-            <a:r>
-              <a:rPr sz="1200" b="0" i="0" u="none">
-                <a:solidFill>
-                  <a:srgbClr val="4F46E5"/>
-                </a:solidFill>
-                <a:latin typeface="Hind Siliguri"/>
-              </a:rPr>
-              <a:t>www.makeuseof.com</a:t>
-            </a:r>
-          </a:p>
-        </p:txBody>
-      </p:sp>
-      <p:sp>
-        <p:nvSpPr>
-          <p:cNvPr id="30" name="TextBox 29"/>
-          <p:cNvSpPr txBox="1"/>
-          <p:nvPr/>
-        </p:nvSpPr>
-        <p:spPr>
-          <a:xfrm>
-            <a:off x="1666875" y="3486150"/>
-            <a:ext cx="10048875" cy="419100"/>
-          </a:xfrm>
-          <a:prstGeom prst="rect">
-            <a:avLst/>
-          </a:prstGeom>
-          <a:noFill/>
-        </p:spPr>
-        <p:txBody>
-          <a:bodyPr wrap="square" lIns="0" tIns="0" rIns="0" bIns="0" anchor="t">
-            <a:spAutoFit/>
-          </a:bodyPr>
-          <a:lstStyle/>
-          <a:p>
-            <a:pPr algn="l"/>
-            <a:r>
-              <a:rPr sz="975" b="0" i="0" u="none">
-                <a:solidFill>
-                  <a:srgbClr val="000000"/>
-                </a:solidFill>
-                <a:latin typeface="Hind Siliguri"/>
-              </a:rPr>
-              <a:t>https://mediaserver.goepson.com/adaptivemedia/rendition?id=2e85f003d1f6ba52c7f18c42481a2af1d97bd8cf&amp;vid=2e85f003d1f6ba52c7f18c42481a2af1d97bd8cf&amp;prid=1200Wx1200H&amp;clid=SAPDAM&amp;prclid=banner&amp;assetDescr=Cover+image+3</a:t>
-            </a:r>
-          </a:p>
-        </p:txBody>
-      </p:sp>
-      <p:sp>
-        <p:nvSpPr>
-          <p:cNvPr id="31" name="TextBox 30"/>
-          <p:cNvSpPr txBox="1"/>
-          <p:nvPr/>
-        </p:nvSpPr>
-        <p:spPr>
-          <a:xfrm>
-            <a:off x="1666875" y="3952875"/>
-            <a:ext cx="1914525" cy="247650"/>
-          </a:xfrm>
-          <a:prstGeom prst="rect">
-            <a:avLst/>
-          </a:prstGeom>
-          <a:noFill/>
-        </p:spPr>
-        <p:txBody>
-          <a:bodyPr wrap="square" lIns="0" tIns="0" rIns="0" bIns="0" anchor="t">
-            <a:spAutoFit/>
-          </a:bodyPr>
-          <a:lstStyle/>
-          <a:p>
-            <a:pPr algn="l"/>
-            <a:r>
-              <a:rPr sz="1200" b="0" i="0" u="none">
-                <a:solidFill>
-                  <a:srgbClr val="000000"/>
-                </a:solidFill>
-                <a:latin typeface="Hind Siliguri"/>
-              </a:rPr>
-              <a:t>Source: </a:t>
-            </a:r>
-            <a:r>
-              <a:rPr sz="1200" b="0" i="0" u="none">
-                <a:solidFill>
-                  <a:srgbClr val="4F46E5"/>
-                </a:solidFill>
-                <a:latin typeface="Hind Siliguri"/>
-              </a:rPr>
-              <a:t>www.epson.com.sg</a:t>
-            </a:r>
-          </a:p>
-        </p:txBody>
-      </p:sp>
-      <p:sp>
-        <p:nvSpPr>
-          <p:cNvPr id="32" name="TextBox 31"/>
-          <p:cNvSpPr txBox="1"/>
-          <p:nvPr/>
-        </p:nvSpPr>
-        <p:spPr>
-          <a:xfrm>
-            <a:off x="1666875" y="4495800"/>
-            <a:ext cx="3362325" cy="209550"/>
-          </a:xfrm>
-          <a:prstGeom prst="rect">
-            <a:avLst/>
-          </a:prstGeom>
-          <a:noFill/>
-        </p:spPr>
-        <p:txBody>
-          <a:bodyPr wrap="square" lIns="0" tIns="0" rIns="0" bIns="0" anchor="t">
-            <a:spAutoFit/>
-          </a:bodyPr>
-          <a:lstStyle/>
-          <a:p>
-            <a:pPr algn="l"/>
-            <a:r>
-              <a:rPr sz="975" b="0" i="0" u="none">
-                <a:solidFill>
-                  <a:srgbClr val="000000"/>
-                </a:solidFill>
-                <a:latin typeface="Hind Siliguri"/>
-              </a:rPr>
-              <a:t>https://miro.medium.com/1*JojdXOr_LuXMCHMYAOv9nw.png</a:t>
-            </a:r>
-          </a:p>
-        </p:txBody>
-      </p:sp>
-      <p:sp>
-        <p:nvSpPr>
-          <p:cNvPr id="33" name="TextBox 32"/>
-          <p:cNvSpPr txBox="1"/>
-          <p:nvPr/>
-        </p:nvSpPr>
-        <p:spPr>
-          <a:xfrm>
-            <a:off x="1666875" y="4752975"/>
-            <a:ext cx="1466850" cy="247650"/>
-          </a:xfrm>
-          <a:prstGeom prst="rect">
-            <a:avLst/>
-          </a:prstGeom>
-          <a:noFill/>
-        </p:spPr>
-        <p:txBody>
-          <a:bodyPr wrap="square" lIns="0" tIns="0" rIns="0" bIns="0" anchor="t">
-            <a:spAutoFit/>
-          </a:bodyPr>
-          <a:lstStyle/>
-          <a:p>
-            <a:pPr algn="l"/>
-            <a:r>
-              <a:rPr sz="1200" b="0" i="0" u="none">
-                <a:solidFill>
-                  <a:srgbClr val="000000"/>
-                </a:solidFill>
-                <a:latin typeface="Hind Siliguri"/>
-              </a:rPr>
-              <a:t>Source: </a:t>
-            </a:r>
-            <a:r>
-              <a:rPr sz="1200" b="0" i="0" u="none">
-                <a:solidFill>
-                  <a:srgbClr val="4F46E5"/>
-                </a:solidFill>
-                <a:latin typeface="Hind Siliguri"/>
-              </a:rPr>
-              <a:t>medium.com</a:t>
-            </a:r>
-          </a:p>
-        </p:txBody>
-      </p:sp>
-      <p:sp>
-        <p:nvSpPr>
-          <p:cNvPr id="34" name="TextBox 33"/>
-          <p:cNvSpPr txBox="1"/>
-          <p:nvPr/>
-        </p:nvSpPr>
-        <p:spPr>
-          <a:xfrm>
-            <a:off x="1666875" y="5295900"/>
-            <a:ext cx="10048875" cy="419100"/>
-          </a:xfrm>
-          <a:prstGeom prst="rect">
-            <a:avLst/>
-          </a:prstGeom>
-          <a:noFill/>
-        </p:spPr>
-        <p:txBody>
-          <a:bodyPr wrap="square" lIns="0" tIns="0" rIns="0" bIns="0" anchor="t">
-            <a:spAutoFit/>
-          </a:bodyPr>
-          <a:lstStyle/>
-          <a:p>
-            <a:pPr algn="l"/>
-            <a:r>
-              <a:rPr sz="975" b="0" i="0" u="none">
-                <a:solidFill>
-                  <a:srgbClr val="000000"/>
-                </a:solidFill>
-                <a:latin typeface="Hind Siliguri"/>
-              </a:rPr>
-              <a:t>https://media-assets.hyperinvento.com/companies/58397719-f88d-4484-af86-a62404db50e2/products/59cf83b0-70c4-40d0-8650-69b53973ca68/featureds/images/fc9aaa632cf14947ae2041471dc01b87-product-featured-lg.jpg</a:t>
-            </a:r>
-          </a:p>
-        </p:txBody>
-      </p:sp>
-      <p:sp>
-        <p:nvSpPr>
-          <p:cNvPr id="35" name="TextBox 34"/>
-          <p:cNvSpPr txBox="1"/>
-          <p:nvPr/>
-        </p:nvSpPr>
-        <p:spPr>
-          <a:xfrm>
-            <a:off x="1666875" y="5762625"/>
-            <a:ext cx="1695450" cy="247650"/>
-          </a:xfrm>
-          <a:prstGeom prst="rect">
-            <a:avLst/>
-          </a:prstGeom>
-          <a:noFill/>
-        </p:spPr>
-        <p:txBody>
-          <a:bodyPr wrap="square" lIns="0" tIns="0" rIns="0" bIns="0" anchor="t">
-            <a:spAutoFit/>
-          </a:bodyPr>
-          <a:lstStyle/>
-          <a:p>
-            <a:pPr algn="l"/>
-            <a:r>
-              <a:rPr sz="1200" b="0" i="0" u="none">
-                <a:solidFill>
-                  <a:srgbClr val="000000"/>
-                </a:solidFill>
-                <a:latin typeface="Hind Siliguri"/>
-              </a:rPr>
-              <a:t>Source: </a:t>
-            </a:r>
-            <a:r>
-              <a:rPr sz="1200" b="0" i="0" u="none">
-                <a:solidFill>
-                  <a:srgbClr val="4F46E5"/>
-                </a:solidFill>
-                <a:latin typeface="Hind Siliguri"/>
-              </a:rPr>
-              <a:t>cloudtechasia.in</a:t>
-            </a:r>
-          </a:p>
-        </p:txBody>
-      </p:sp>
-    </p:spTree>
-  </p:cSld>
-  <p:clrMapOvr>
-    <a:masterClrMapping/>
-  </p:clrMapOvr>
-</p:sld>
-</file>
-
-<file path=ppt/slides/slide17.xml><?xml version="1.0" encoding="utf-8"?>
-<p:sld xmlns:a="http://schemas.openxmlformats.org/drawingml/2006/main" xmlns:r="http://schemas.openxmlformats.org/officeDocument/2006/relationships" xmlns:p="http://schemas.openxmlformats.org/presentationml/2006/main">
-  <p:cSld>
-    <p:bg>
-      <p:bgPr>
-        <a:solidFill>
-          <a:srgbClr val="FFFFFF"/>
-        </a:solidFill>
-        <a:effectLst/>
-      </p:bgPr>
-    </p:bg>
-    <p:spTree>
-      <p:nvGrpSpPr>
-        <p:cNvPr id="1" name=""/>
-        <p:cNvGrpSpPr/>
-        <p:nvPr/>
-      </p:nvGrpSpPr>
-      <p:grpSpPr>
-        <a:xfrm>
-          <a:off x="0" y="0"/>
-          <a:ext cx="0" cy="0"/>
-          <a:chOff x="0" y="0"/>
-          <a:chExt cx="0" cy="0"/>
-        </a:xfrm>
-      </p:grpSpPr>
-      <p:sp>
-        <p:nvSpPr>
-          <p:cNvPr id="2" name="Rectangle 1"/>
-          <p:cNvSpPr/>
-          <p:nvPr/>
-        </p:nvSpPr>
-        <p:spPr>
-          <a:xfrm>
-            <a:off x="571500" y="942975"/>
-            <a:ext cx="11049000" cy="800100"/>
-          </a:xfrm>
-          <a:prstGeom prst="rect">
-            <a:avLst/>
-          </a:prstGeom>
-          <a:noFill/>
-          <a:ln>
-            <a:noFill/>
-          </a:ln>
-          <a:effectLst/>
-        </p:spPr>
-        <p:style>
-          <a:lnRef idx="1">
-            <a:schemeClr val="accent1"/>
-          </a:lnRef>
-          <a:fillRef idx="3">
-            <a:schemeClr val="accent1"/>
-          </a:fillRef>
-          <a:effectRef idx="2">
-            <a:schemeClr val="accent1"/>
-          </a:effectRef>
-          <a:fontRef idx="minor">
-            <a:schemeClr val="lt1"/>
-          </a:fontRef>
-        </p:style>
-        <p:txBody>
-          <a:bodyPr rtlCol="0" anchor="ctr"/>
-          <a:lstStyle/>
-          <a:p>
-            <a:pPr algn="ctr"/>
-            <a:endParaRPr/>
-          </a:p>
-        </p:txBody>
-      </p:sp>
-      <p:sp>
-        <p:nvSpPr>
-          <p:cNvPr id="3" name="Rectangle 2"/>
-          <p:cNvSpPr/>
-          <p:nvPr/>
-        </p:nvSpPr>
-        <p:spPr>
-          <a:xfrm>
-            <a:off x="571500" y="1743075"/>
-            <a:ext cx="11049000" cy="800100"/>
-          </a:xfrm>
-          <a:prstGeom prst="rect">
-            <a:avLst/>
-          </a:prstGeom>
-          <a:noFill/>
-          <a:ln>
-            <a:noFill/>
-          </a:ln>
-          <a:effectLst/>
-        </p:spPr>
-        <p:style>
-          <a:lnRef idx="1">
-            <a:schemeClr val="accent1"/>
-          </a:lnRef>
-          <a:fillRef idx="3">
-            <a:schemeClr val="accent1"/>
-          </a:fillRef>
-          <a:effectRef idx="2">
-            <a:schemeClr val="accent1"/>
-          </a:effectRef>
-          <a:fontRef idx="minor">
-            <a:schemeClr val="lt1"/>
-          </a:fontRef>
-        </p:style>
-        <p:txBody>
-          <a:bodyPr rtlCol="0" anchor="ctr"/>
-          <a:lstStyle/>
-          <a:p>
-            <a:pPr algn="ctr"/>
-            <a:endParaRPr/>
-          </a:p>
-        </p:txBody>
-      </p:sp>
-      <p:sp>
-        <p:nvSpPr>
-          <p:cNvPr id="4" name="Rectangle 3"/>
-          <p:cNvSpPr/>
-          <p:nvPr/>
-        </p:nvSpPr>
-        <p:spPr>
-          <a:xfrm>
-            <a:off x="571500" y="2543175"/>
-            <a:ext cx="11049000" cy="800100"/>
-          </a:xfrm>
-          <a:prstGeom prst="rect">
-            <a:avLst/>
-          </a:prstGeom>
-          <a:noFill/>
-          <a:ln>
-            <a:noFill/>
-          </a:ln>
-          <a:effectLst/>
-        </p:spPr>
-        <p:style>
-          <a:lnRef idx="1">
-            <a:schemeClr val="accent1"/>
-          </a:lnRef>
-          <a:fillRef idx="3">
-            <a:schemeClr val="accent1"/>
-          </a:fillRef>
-          <a:effectRef idx="2">
-            <a:schemeClr val="accent1"/>
-          </a:effectRef>
-          <a:fontRef idx="minor">
-            <a:schemeClr val="lt1"/>
-          </a:fontRef>
-        </p:style>
-        <p:txBody>
-          <a:bodyPr rtlCol="0" anchor="ctr"/>
-          <a:lstStyle/>
-          <a:p>
-            <a:pPr algn="ctr"/>
-            <a:endParaRPr/>
-          </a:p>
-        </p:txBody>
-      </p:sp>
-      <p:sp>
-        <p:nvSpPr>
-          <p:cNvPr id="5" name="Rectangle 4"/>
-          <p:cNvSpPr/>
-          <p:nvPr/>
-        </p:nvSpPr>
-        <p:spPr>
-          <a:xfrm>
-            <a:off x="571500" y="3343275"/>
-            <a:ext cx="11049000" cy="800100"/>
-          </a:xfrm>
-          <a:prstGeom prst="rect">
-            <a:avLst/>
-          </a:prstGeom>
-          <a:noFill/>
-          <a:ln>
-            <a:noFill/>
-          </a:ln>
-          <a:effectLst/>
-        </p:spPr>
-        <p:style>
-          <a:lnRef idx="1">
-            <a:schemeClr val="accent1"/>
-          </a:lnRef>
-          <a:fillRef idx="3">
-            <a:schemeClr val="accent1"/>
-          </a:fillRef>
-          <a:effectRef idx="2">
-            <a:schemeClr val="accent1"/>
-          </a:effectRef>
-          <a:fontRef idx="minor">
-            <a:schemeClr val="lt1"/>
-          </a:fontRef>
-        </p:style>
-        <p:txBody>
-          <a:bodyPr rtlCol="0" anchor="ctr"/>
-          <a:lstStyle/>
-          <a:p>
-            <a:pPr algn="ctr"/>
-            <a:endParaRPr/>
-          </a:p>
-        </p:txBody>
-      </p:sp>
-      <p:sp>
-        <p:nvSpPr>
-          <p:cNvPr id="6" name="Rectangle 5"/>
-          <p:cNvSpPr/>
-          <p:nvPr/>
-        </p:nvSpPr>
-        <p:spPr>
-          <a:xfrm>
-            <a:off x="571500" y="1733550"/>
-            <a:ext cx="11049000" cy="9525"/>
-          </a:xfrm>
-          <a:prstGeom prst="rect">
-            <a:avLst/>
-          </a:prstGeom>
-          <a:solidFill>
-            <a:srgbClr val="757575"/>
-          </a:solidFill>
-          <a:ln>
-            <a:noFill/>
-          </a:ln>
-          <a:effectLst/>
-        </p:spPr>
-        <p:style>
-          <a:lnRef idx="1">
-            <a:schemeClr val="accent1"/>
-          </a:lnRef>
-          <a:fillRef idx="3">
-            <a:schemeClr val="accent1"/>
-          </a:fillRef>
-          <a:effectRef idx="2">
-            <a:schemeClr val="accent1"/>
-          </a:effectRef>
-          <a:fontRef idx="minor">
-            <a:schemeClr val="lt1"/>
-          </a:fontRef>
-        </p:style>
-        <p:txBody>
-          <a:bodyPr rtlCol="0" anchor="ctr"/>
-          <a:lstStyle/>
-          <a:p>
-            <a:pPr algn="ctr"/>
-            <a:endParaRPr/>
-          </a:p>
-        </p:txBody>
-      </p:sp>
-      <p:sp>
-        <p:nvSpPr>
-          <p:cNvPr id="7" name="Rectangle 6"/>
-          <p:cNvSpPr/>
-          <p:nvPr/>
-        </p:nvSpPr>
-        <p:spPr>
-          <a:xfrm>
-            <a:off x="571500" y="1733550"/>
-            <a:ext cx="11049000" cy="9525"/>
-          </a:xfrm>
-          <a:prstGeom prst="rect">
-            <a:avLst/>
-          </a:prstGeom>
-          <a:solidFill>
-            <a:srgbClr val="757575"/>
-          </a:solidFill>
-          <a:ln>
-            <a:noFill/>
-          </a:ln>
-          <a:effectLst/>
-        </p:spPr>
-        <p:style>
-          <a:lnRef idx="1">
-            <a:schemeClr val="accent1"/>
-          </a:lnRef>
-          <a:fillRef idx="3">
-            <a:schemeClr val="accent1"/>
-          </a:fillRef>
-          <a:effectRef idx="2">
-            <a:schemeClr val="accent1"/>
-          </a:effectRef>
-          <a:fontRef idx="minor">
-            <a:schemeClr val="lt1"/>
-          </a:fontRef>
-        </p:style>
-        <p:txBody>
-          <a:bodyPr rtlCol="0" anchor="ctr"/>
-          <a:lstStyle/>
-          <a:p>
-            <a:pPr algn="ctr"/>
-            <a:endParaRPr/>
-          </a:p>
-        </p:txBody>
-      </p:sp>
-      <p:sp>
-        <p:nvSpPr>
-          <p:cNvPr id="8" name="Rectangle 7"/>
-          <p:cNvSpPr/>
-          <p:nvPr/>
-        </p:nvSpPr>
-        <p:spPr>
-          <a:xfrm>
-            <a:off x="571500" y="2533650"/>
-            <a:ext cx="11049000" cy="9525"/>
-          </a:xfrm>
-          <a:prstGeom prst="rect">
-            <a:avLst/>
-          </a:prstGeom>
-          <a:solidFill>
-            <a:srgbClr val="757575"/>
-          </a:solidFill>
-          <a:ln>
-            <a:noFill/>
-          </a:ln>
-          <a:effectLst/>
-        </p:spPr>
-        <p:style>
-          <a:lnRef idx="1">
-            <a:schemeClr val="accent1"/>
-          </a:lnRef>
-          <a:fillRef idx="3">
-            <a:schemeClr val="accent1"/>
-          </a:fillRef>
-          <a:effectRef idx="2">
-            <a:schemeClr val="accent1"/>
-          </a:effectRef>
-          <a:fontRef idx="minor">
-            <a:schemeClr val="lt1"/>
-          </a:fontRef>
-        </p:style>
-        <p:txBody>
-          <a:bodyPr rtlCol="0" anchor="ctr"/>
-          <a:lstStyle/>
-          <a:p>
-            <a:pPr algn="ctr"/>
-            <a:endParaRPr/>
-          </a:p>
-        </p:txBody>
-      </p:sp>
-      <p:sp>
-        <p:nvSpPr>
-          <p:cNvPr id="9" name="Rectangle 8"/>
-          <p:cNvSpPr/>
-          <p:nvPr/>
-        </p:nvSpPr>
-        <p:spPr>
-          <a:xfrm>
-            <a:off x="571500" y="2533650"/>
-            <a:ext cx="11049000" cy="9525"/>
-          </a:xfrm>
-          <a:prstGeom prst="rect">
-            <a:avLst/>
-          </a:prstGeom>
-          <a:solidFill>
-            <a:srgbClr val="757575"/>
-          </a:solidFill>
-          <a:ln>
-            <a:noFill/>
-          </a:ln>
-          <a:effectLst/>
-        </p:spPr>
-        <p:style>
-          <a:lnRef idx="1">
-            <a:schemeClr val="accent1"/>
-          </a:lnRef>
-          <a:fillRef idx="3">
-            <a:schemeClr val="accent1"/>
-          </a:fillRef>
-          <a:effectRef idx="2">
-            <a:schemeClr val="accent1"/>
-          </a:effectRef>
-          <a:fontRef idx="minor">
-            <a:schemeClr val="lt1"/>
-          </a:fontRef>
-        </p:style>
-        <p:txBody>
-          <a:bodyPr rtlCol="0" anchor="ctr"/>
-          <a:lstStyle/>
-          <a:p>
-            <a:pPr algn="ctr"/>
-            <a:endParaRPr/>
-          </a:p>
-        </p:txBody>
-      </p:sp>
-      <p:sp>
-        <p:nvSpPr>
-          <p:cNvPr id="10" name="Rectangle 9"/>
-          <p:cNvSpPr/>
-          <p:nvPr/>
-        </p:nvSpPr>
-        <p:spPr>
-          <a:xfrm>
-            <a:off x="571500" y="3333750"/>
-            <a:ext cx="11049000" cy="9525"/>
-          </a:xfrm>
-          <a:prstGeom prst="rect">
-            <a:avLst/>
-          </a:prstGeom>
-          <a:solidFill>
-            <a:srgbClr val="757575"/>
-          </a:solidFill>
-          <a:ln>
-            <a:noFill/>
-          </a:ln>
-          <a:effectLst/>
-        </p:spPr>
-        <p:style>
-          <a:lnRef idx="1">
-            <a:schemeClr val="accent1"/>
-          </a:lnRef>
-          <a:fillRef idx="3">
-            <a:schemeClr val="accent1"/>
-          </a:fillRef>
-          <a:effectRef idx="2">
-            <a:schemeClr val="accent1"/>
-          </a:effectRef>
-          <a:fontRef idx="minor">
-            <a:schemeClr val="lt1"/>
-          </a:fontRef>
-        </p:style>
-        <p:txBody>
-          <a:bodyPr rtlCol="0" anchor="ctr"/>
-          <a:lstStyle/>
-          <a:p>
-            <a:pPr algn="ctr"/>
-            <a:endParaRPr/>
-          </a:p>
-        </p:txBody>
-      </p:sp>
-      <p:sp>
-        <p:nvSpPr>
-          <p:cNvPr id="11" name="Rectangle 10"/>
-          <p:cNvSpPr/>
-          <p:nvPr/>
-        </p:nvSpPr>
-        <p:spPr>
-          <a:xfrm>
-            <a:off x="571500" y="3333750"/>
-            <a:ext cx="11049000" cy="9525"/>
-          </a:xfrm>
-          <a:prstGeom prst="rect">
-            <a:avLst/>
-          </a:prstGeom>
-          <a:solidFill>
-            <a:srgbClr val="757575"/>
-          </a:solidFill>
-          <a:ln>
-            <a:noFill/>
-          </a:ln>
-          <a:effectLst/>
-        </p:spPr>
-        <p:style>
-          <a:lnRef idx="1">
-            <a:schemeClr val="accent1"/>
-          </a:lnRef>
-          <a:fillRef idx="3">
-            <a:schemeClr val="accent1"/>
-          </a:fillRef>
-          <a:effectRef idx="2">
-            <a:schemeClr val="accent1"/>
-          </a:effectRef>
-          <a:fontRef idx="minor">
-            <a:schemeClr val="lt1"/>
-          </a:fontRef>
-        </p:style>
-        <p:txBody>
-          <a:bodyPr rtlCol="0" anchor="ctr"/>
-          <a:lstStyle/>
-          <a:p>
-            <a:pPr algn="ctr"/>
-            <a:endParaRPr/>
-          </a:p>
-        </p:txBody>
-      </p:sp>
-      <p:sp>
-        <p:nvSpPr>
-          <p:cNvPr id="12" name="Rectangle 11"/>
-          <p:cNvSpPr/>
-          <p:nvPr/>
-        </p:nvSpPr>
-        <p:spPr>
-          <a:xfrm>
-            <a:off x="571500" y="4133850"/>
-            <a:ext cx="11049000" cy="9525"/>
-          </a:xfrm>
-          <a:prstGeom prst="rect">
-            <a:avLst/>
-          </a:prstGeom>
-          <a:solidFill>
-            <a:srgbClr val="757575"/>
-          </a:solidFill>
-          <a:ln>
-            <a:noFill/>
-          </a:ln>
-          <a:effectLst/>
-        </p:spPr>
-        <p:style>
-          <a:lnRef idx="1">
-            <a:schemeClr val="accent1"/>
-          </a:lnRef>
-          <a:fillRef idx="3">
-            <a:schemeClr val="accent1"/>
-          </a:fillRef>
-          <a:effectRef idx="2">
-            <a:schemeClr val="accent1"/>
-          </a:effectRef>
-          <a:fontRef idx="minor">
-            <a:schemeClr val="lt1"/>
-          </a:fontRef>
-        </p:style>
-        <p:txBody>
-          <a:bodyPr rtlCol="0" anchor="ctr"/>
-          <a:lstStyle/>
-          <a:p>
-            <a:pPr algn="ctr"/>
-            <a:endParaRPr/>
-          </a:p>
-        </p:txBody>
-      </p:sp>
-      <p:sp>
-        <p:nvSpPr>
-          <p:cNvPr id="13" name="Rectangle 12"/>
-          <p:cNvSpPr/>
-          <p:nvPr/>
-        </p:nvSpPr>
-        <p:spPr>
-          <a:xfrm>
-            <a:off x="571500" y="4133850"/>
-            <a:ext cx="11049000" cy="9525"/>
-          </a:xfrm>
-          <a:prstGeom prst="rect">
-            <a:avLst/>
-          </a:prstGeom>
-          <a:solidFill>
-            <a:srgbClr val="757575"/>
-          </a:solidFill>
-          <a:ln>
-            <a:noFill/>
-          </a:ln>
-          <a:effectLst/>
-        </p:spPr>
-        <p:style>
-          <a:lnRef idx="1">
-            <a:schemeClr val="accent1"/>
-          </a:lnRef>
-          <a:fillRef idx="3">
-            <a:schemeClr val="accent1"/>
-          </a:fillRef>
-          <a:effectRef idx="2">
-            <a:schemeClr val="accent1"/>
-          </a:effectRef>
-          <a:fontRef idx="minor">
-            <a:schemeClr val="lt1"/>
-          </a:fontRef>
-        </p:style>
-        <p:txBody>
-          <a:bodyPr rtlCol="0" anchor="ctr"/>
-          <a:lstStyle/>
-          <a:p>
-            <a:pPr algn="ctr"/>
-            <a:endParaRPr/>
-          </a:p>
-        </p:txBody>
-      </p:sp>
-      <p:pic>
-        <p:nvPicPr>
-          <p:cNvPr id="14" name="Picture 13" descr="image.png"/>
-          <p:cNvPicPr>
-            <a:picLocks noChangeAspect="1"/>
-          </p:cNvPicPr>
-          <p:nvPr/>
-        </p:nvPicPr>
-        <p:blipFill>
-          <a:blip r:embed="rId2"/>
-          <a:stretch>
-            <a:fillRect/>
-          </a:stretch>
-        </p:blipFill>
-        <p:spPr>
-          <a:xfrm>
-            <a:off x="571500" y="1100137"/>
-            <a:ext cx="857250" cy="476250"/>
-          </a:xfrm>
-          <a:prstGeom prst="rect">
-            <a:avLst/>
-          </a:prstGeom>
-        </p:spPr>
-      </p:pic>
-      <p:pic>
-        <p:nvPicPr>
-          <p:cNvPr id="15" name="Picture 14" descr="image.png"/>
-          <p:cNvPicPr>
-            <a:picLocks noChangeAspect="1"/>
-          </p:cNvPicPr>
-          <p:nvPr/>
-        </p:nvPicPr>
-        <p:blipFill>
-          <a:blip r:embed="rId3"/>
-          <a:stretch>
-            <a:fillRect/>
-          </a:stretch>
-        </p:blipFill>
-        <p:spPr>
-          <a:xfrm>
-            <a:off x="571500" y="1900237"/>
-            <a:ext cx="857250" cy="476250"/>
-          </a:xfrm>
-          <a:prstGeom prst="rect">
-            <a:avLst/>
-          </a:prstGeom>
-        </p:spPr>
-      </p:pic>
-      <p:pic>
-        <p:nvPicPr>
-          <p:cNvPr id="16" name="Picture 15" descr="image.png"/>
-          <p:cNvPicPr>
-            <a:picLocks noChangeAspect="1"/>
-          </p:cNvPicPr>
-          <p:nvPr/>
-        </p:nvPicPr>
-        <p:blipFill>
-          <a:blip r:embed="rId4"/>
-          <a:stretch>
-            <a:fillRect/>
-          </a:stretch>
-        </p:blipFill>
-        <p:spPr>
-          <a:xfrm>
-            <a:off x="571500" y="2700337"/>
-            <a:ext cx="857250" cy="476250"/>
-          </a:xfrm>
-          <a:prstGeom prst="rect">
-            <a:avLst/>
-          </a:prstGeom>
-        </p:spPr>
-      </p:pic>
-      <p:pic>
-        <p:nvPicPr>
-          <p:cNvPr id="17" name="Picture 16" descr="image.png"/>
-          <p:cNvPicPr>
-            <a:picLocks noChangeAspect="1"/>
-          </p:cNvPicPr>
-          <p:nvPr/>
-        </p:nvPicPr>
-        <p:blipFill>
-          <a:blip r:embed="rId5"/>
-          <a:stretch>
-            <a:fillRect/>
-          </a:stretch>
-        </p:blipFill>
-        <p:spPr>
-          <a:xfrm>
-            <a:off x="571500" y="3500437"/>
-            <a:ext cx="857250" cy="476250"/>
-          </a:xfrm>
-          <a:prstGeom prst="rect">
-            <a:avLst/>
-          </a:prstGeom>
-        </p:spPr>
-      </p:pic>
-      <p:pic>
-        <p:nvPicPr>
-          <p:cNvPr id="18" name="Picture 17" descr="image.png"/>
-          <p:cNvPicPr>
-            <a:picLocks noChangeAspect="1"/>
-          </p:cNvPicPr>
-          <p:nvPr/>
-        </p:nvPicPr>
-        <p:blipFill>
-          <a:blip r:embed="rId6"/>
-          <a:stretch>
-            <a:fillRect/>
-          </a:stretch>
-        </p:blipFill>
-        <p:spPr>
-          <a:xfrm>
-            <a:off x="571500" y="4300537"/>
-            <a:ext cx="857250" cy="476250"/>
-          </a:xfrm>
-          <a:prstGeom prst="rect">
-            <a:avLst/>
-          </a:prstGeom>
-        </p:spPr>
-      </p:pic>
-      <p:sp>
-        <p:nvSpPr>
-          <p:cNvPr id="19" name="TextBox 18"/>
-          <p:cNvSpPr txBox="1"/>
-          <p:nvPr/>
-        </p:nvSpPr>
-        <p:spPr>
-          <a:xfrm>
-            <a:off x="571500" y="571500"/>
-            <a:ext cx="1660207" cy="371475"/>
-          </a:xfrm>
-          <a:prstGeom prst="rect">
-            <a:avLst/>
-          </a:prstGeom>
-          <a:noFill/>
-        </p:spPr>
-        <p:txBody>
-          <a:bodyPr wrap="square" lIns="0" tIns="0" rIns="0" bIns="0" anchor="t">
-            <a:spAutoFit/>
-          </a:bodyPr>
-          <a:lstStyle/>
-          <a:p>
-            <a:pPr algn="l"/>
-            <a:r>
-              <a:rPr sz="1800" b="1" i="0" u="none">
-                <a:solidFill>
-                  <a:srgbClr val="000000"/>
-                </a:solidFill>
-                <a:latin typeface="Hind Siliguri"/>
-              </a:rPr>
-              <a:t>Image Sources</a:t>
-            </a:r>
-          </a:p>
-        </p:txBody>
-      </p:sp>
-      <p:sp>
-        <p:nvSpPr>
-          <p:cNvPr id="20" name="TextBox 19"/>
-          <p:cNvSpPr txBox="1"/>
-          <p:nvPr/>
-        </p:nvSpPr>
-        <p:spPr>
-          <a:xfrm>
-            <a:off x="1666875" y="1085850"/>
-            <a:ext cx="8305800" cy="209550"/>
-          </a:xfrm>
-          <a:prstGeom prst="rect">
-            <a:avLst/>
-          </a:prstGeom>
-          <a:noFill/>
-        </p:spPr>
-        <p:txBody>
-          <a:bodyPr wrap="square" lIns="0" tIns="0" rIns="0" bIns="0" anchor="t">
-            <a:spAutoFit/>
-          </a:bodyPr>
-          <a:lstStyle/>
-          <a:p>
-            <a:pPr algn="l"/>
-            <a:r>
-              <a:rPr sz="975" b="0" i="0" u="none">
-                <a:solidFill>
-                  <a:srgbClr val="000000"/>
-                </a:solidFill>
-                <a:latin typeface="Hind Siliguri"/>
-              </a:rPr>
-              <a:t>http://nzxt.com/cdn/shop/articles/1663155864-hard-disk-drive-hdd-solid-state-drive-ssd-and-ssd-2021-08-29-21-04-56-utc-1.jpg?v=1743098063&amp;width=2048</a:t>
-            </a:r>
-          </a:p>
-        </p:txBody>
-      </p:sp>
-      <p:sp>
-        <p:nvSpPr>
-          <p:cNvPr id="21" name="TextBox 20"/>
-          <p:cNvSpPr txBox="1"/>
-          <p:nvPr/>
-        </p:nvSpPr>
-        <p:spPr>
-          <a:xfrm>
-            <a:off x="1666875" y="1343025"/>
-            <a:ext cx="1219200" cy="247650"/>
-          </a:xfrm>
-          <a:prstGeom prst="rect">
-            <a:avLst/>
-          </a:prstGeom>
-          <a:noFill/>
-        </p:spPr>
-        <p:txBody>
-          <a:bodyPr wrap="square" lIns="0" tIns="0" rIns="0" bIns="0" anchor="t">
-            <a:spAutoFit/>
-          </a:bodyPr>
-          <a:lstStyle/>
-          <a:p>
-            <a:pPr algn="l"/>
-            <a:r>
-              <a:rPr sz="1200" b="0" i="0" u="none">
-                <a:solidFill>
-                  <a:srgbClr val="000000"/>
-                </a:solidFill>
-                <a:latin typeface="Hind Siliguri"/>
-              </a:rPr>
-              <a:t>Source: </a:t>
-            </a:r>
-            <a:r>
-              <a:rPr sz="1200" b="0" i="0" u="none">
-                <a:solidFill>
-                  <a:srgbClr val="4F46E5"/>
-                </a:solidFill>
-                <a:latin typeface="Hind Siliguri"/>
-              </a:rPr>
-              <a:t>nzxt.com</a:t>
-            </a:r>
-          </a:p>
-        </p:txBody>
-      </p:sp>
-      <p:sp>
-        <p:nvSpPr>
-          <p:cNvPr id="22" name="TextBox 21"/>
-          <p:cNvSpPr txBox="1"/>
-          <p:nvPr/>
-        </p:nvSpPr>
-        <p:spPr>
-          <a:xfrm>
-            <a:off x="1666875" y="1885950"/>
-            <a:ext cx="8067675" cy="209550"/>
-          </a:xfrm>
-          <a:prstGeom prst="rect">
-            <a:avLst/>
-          </a:prstGeom>
-          <a:noFill/>
-        </p:spPr>
-        <p:txBody>
-          <a:bodyPr wrap="square" lIns="0" tIns="0" rIns="0" bIns="0" anchor="t">
-            <a:spAutoFit/>
-          </a:bodyPr>
-          <a:lstStyle/>
-          <a:p>
-            <a:pPr algn="l"/>
-            <a:r>
-              <a:rPr sz="975" b="0" i="0" u="none">
-                <a:solidFill>
-                  <a:srgbClr val="000000"/>
-                </a:solidFill>
-                <a:latin typeface="Hind Siliguri"/>
-              </a:rPr>
-              <a:t>https://images.unsplash.com/photo-1716772912386-af8c7c33dea3?fm=jpg&amp;q=60&amp;w=3000&amp;auto=format&amp;fit=crop&amp;ixlib=rb-4.1.0&amp;ixid=NHwxMjA3fDA%3D</a:t>
-            </a:r>
-          </a:p>
-        </p:txBody>
-      </p:sp>
-      <p:sp>
-        <p:nvSpPr>
-          <p:cNvPr id="23" name="TextBox 22"/>
-          <p:cNvSpPr txBox="1"/>
-          <p:nvPr/>
-        </p:nvSpPr>
-        <p:spPr>
-          <a:xfrm>
-            <a:off x="1666875" y="2143125"/>
-            <a:ext cx="1524000" cy="247650"/>
-          </a:xfrm>
-          <a:prstGeom prst="rect">
-            <a:avLst/>
-          </a:prstGeom>
-          <a:noFill/>
-        </p:spPr>
-        <p:txBody>
-          <a:bodyPr wrap="square" lIns="0" tIns="0" rIns="0" bIns="0" anchor="t">
-            <a:spAutoFit/>
-          </a:bodyPr>
-          <a:lstStyle/>
-          <a:p>
-            <a:pPr algn="l"/>
-            <a:r>
-              <a:rPr sz="1200" b="0" i="0" u="none">
-                <a:solidFill>
-                  <a:srgbClr val="000000"/>
-                </a:solidFill>
-                <a:latin typeface="Hind Siliguri"/>
-              </a:rPr>
-              <a:t>Source: </a:t>
-            </a:r>
-            <a:r>
-              <a:rPr sz="1200" b="0" i="0" u="none">
-                <a:solidFill>
-                  <a:srgbClr val="4F46E5"/>
-                </a:solidFill>
-                <a:latin typeface="Hind Siliguri"/>
-              </a:rPr>
-              <a:t>unsplash.com</a:t>
-            </a:r>
-          </a:p>
-        </p:txBody>
-      </p:sp>
-      <p:sp>
-        <p:nvSpPr>
-          <p:cNvPr id="24" name="TextBox 23"/>
-          <p:cNvSpPr txBox="1"/>
-          <p:nvPr/>
-        </p:nvSpPr>
-        <p:spPr>
-          <a:xfrm>
-            <a:off x="1666875" y="2686050"/>
-            <a:ext cx="4210050" cy="209550"/>
-          </a:xfrm>
-          <a:prstGeom prst="rect">
-            <a:avLst/>
-          </a:prstGeom>
-          <a:noFill/>
-        </p:spPr>
-        <p:txBody>
-          <a:bodyPr wrap="square" lIns="0" tIns="0" rIns="0" bIns="0" anchor="t">
-            <a:spAutoFit/>
-          </a:bodyPr>
-          <a:lstStyle/>
-          <a:p>
-            <a:pPr algn="l"/>
-            <a:r>
-              <a:rPr sz="975" b="0" i="0" u="none">
-                <a:solidFill>
-                  <a:srgbClr val="000000"/>
-                </a:solidFill>
-                <a:latin typeface="Hind Siliguri"/>
-              </a:rPr>
-              <a:t>https://4.imimg.com/data4/FH/GC/ANDROID-12999846/product-500x500.jpeg</a:t>
-            </a:r>
-          </a:p>
-        </p:txBody>
-      </p:sp>
-      <p:sp>
-        <p:nvSpPr>
-          <p:cNvPr id="25" name="TextBox 24"/>
-          <p:cNvSpPr txBox="1"/>
-          <p:nvPr/>
-        </p:nvSpPr>
-        <p:spPr>
-          <a:xfrm>
-            <a:off x="1666875" y="2943225"/>
-            <a:ext cx="1962150" cy="247650"/>
-          </a:xfrm>
-          <a:prstGeom prst="rect">
-            <a:avLst/>
-          </a:prstGeom>
-          <a:noFill/>
-        </p:spPr>
-        <p:txBody>
-          <a:bodyPr wrap="square" lIns="0" tIns="0" rIns="0" bIns="0" anchor="t">
-            <a:spAutoFit/>
-          </a:bodyPr>
-          <a:lstStyle/>
-          <a:p>
-            <a:pPr algn="l"/>
-            <a:r>
-              <a:rPr sz="1200" b="0" i="0" u="none">
-                <a:solidFill>
-                  <a:srgbClr val="000000"/>
-                </a:solidFill>
-                <a:latin typeface="Hind Siliguri"/>
-              </a:rPr>
-              <a:t>Source: </a:t>
-            </a:r>
-            <a:r>
-              <a:rPr sz="1200" b="0" i="0" u="none">
-                <a:solidFill>
-                  <a:srgbClr val="4F46E5"/>
-                </a:solidFill>
-                <a:latin typeface="Hind Siliguri"/>
-              </a:rPr>
-              <a:t>www.indiamart.com</a:t>
-            </a:r>
-          </a:p>
-        </p:txBody>
-      </p:sp>
-      <p:sp>
-        <p:nvSpPr>
-          <p:cNvPr id="26" name="TextBox 25"/>
-          <p:cNvSpPr txBox="1"/>
-          <p:nvPr/>
-        </p:nvSpPr>
-        <p:spPr>
-          <a:xfrm>
-            <a:off x="1666875" y="3486150"/>
-            <a:ext cx="6267450" cy="209550"/>
-          </a:xfrm>
-          <a:prstGeom prst="rect">
-            <a:avLst/>
-          </a:prstGeom>
-          <a:noFill/>
-        </p:spPr>
-        <p:txBody>
-          <a:bodyPr wrap="square" lIns="0" tIns="0" rIns="0" bIns="0" anchor="t">
-            <a:spAutoFit/>
-          </a:bodyPr>
-          <a:lstStyle/>
-          <a:p>
-            <a:pPr algn="l"/>
-            <a:r>
-              <a:rPr sz="975" b="0" i="0" u="none">
-                <a:solidFill>
-                  <a:srgbClr val="000000"/>
-                </a:solidFill>
-                <a:latin typeface="Hind Siliguri"/>
-              </a:rPr>
-              <a:t>https://kamerpower.com/wp-content/uploads/2025/10/Printers-Output-devices-GCE-AL-Computer-science-topic.jpg</a:t>
-            </a:r>
-          </a:p>
-        </p:txBody>
-      </p:sp>
-      <p:sp>
-        <p:nvSpPr>
-          <p:cNvPr id="27" name="TextBox 26"/>
-          <p:cNvSpPr txBox="1"/>
-          <p:nvPr/>
-        </p:nvSpPr>
-        <p:spPr>
-          <a:xfrm>
-            <a:off x="1666875" y="3743325"/>
-            <a:ext cx="1752600" cy="247650"/>
-          </a:xfrm>
-          <a:prstGeom prst="rect">
-            <a:avLst/>
-          </a:prstGeom>
-          <a:noFill/>
-        </p:spPr>
-        <p:txBody>
-          <a:bodyPr wrap="square" lIns="0" tIns="0" rIns="0" bIns="0" anchor="t">
-            <a:spAutoFit/>
-          </a:bodyPr>
-          <a:lstStyle/>
-          <a:p>
-            <a:pPr algn="l"/>
-            <a:r>
-              <a:rPr sz="1200" b="0" i="0" u="none">
-                <a:solidFill>
-                  <a:srgbClr val="000000"/>
-                </a:solidFill>
-                <a:latin typeface="Hind Siliguri"/>
-              </a:rPr>
-              <a:t>Source: </a:t>
-            </a:r>
-            <a:r>
-              <a:rPr sz="1200" b="0" i="0" u="none">
-                <a:solidFill>
-                  <a:srgbClr val="4F46E5"/>
-                </a:solidFill>
-                <a:latin typeface="Hind Siliguri"/>
-              </a:rPr>
-              <a:t>kamerpower.com</a:t>
-            </a:r>
-          </a:p>
-        </p:txBody>
-      </p:sp>
-      <p:sp>
-        <p:nvSpPr>
-          <p:cNvPr id="28" name="TextBox 27"/>
-          <p:cNvSpPr txBox="1"/>
-          <p:nvPr/>
-        </p:nvSpPr>
-        <p:spPr>
-          <a:xfrm>
-            <a:off x="1666875" y="4286250"/>
-            <a:ext cx="9258300" cy="209550"/>
-          </a:xfrm>
-          <a:prstGeom prst="rect">
-            <a:avLst/>
-          </a:prstGeom>
-          <a:noFill/>
-        </p:spPr>
-        <p:txBody>
-          <a:bodyPr wrap="square" lIns="0" tIns="0" rIns="0" bIns="0" anchor="t">
-            <a:spAutoFit/>
-          </a:bodyPr>
-          <a:lstStyle/>
-          <a:p>
-            <a:pPr algn="l"/>
-            <a:r>
-              <a:rPr sz="975" b="0" i="0" u="none">
-                <a:solidFill>
-                  <a:srgbClr val="000000"/>
-                </a:solidFill>
-                <a:latin typeface="Hind Siliguri"/>
-              </a:rPr>
-              <a:t>https://spcdn.shortpixel.ai/spio/ret_img+q_cdnize+to_webp+s_webp/soundcertified.com/wp-content/uploads/2021/10/computer-and-laptop-audio-output-jacks-examples.jpg</a:t>
-            </a:r>
-          </a:p>
-        </p:txBody>
-      </p:sp>
-      <p:sp>
-        <p:nvSpPr>
-          <p:cNvPr id="29" name="TextBox 28"/>
-          <p:cNvSpPr txBox="1"/>
-          <p:nvPr/>
-        </p:nvSpPr>
-        <p:spPr>
-          <a:xfrm>
-            <a:off x="1666875" y="4543425"/>
-            <a:ext cx="1885950" cy="247650"/>
-          </a:xfrm>
-          <a:prstGeom prst="rect">
-            <a:avLst/>
-          </a:prstGeom>
-          <a:noFill/>
-        </p:spPr>
-        <p:txBody>
-          <a:bodyPr wrap="square" lIns="0" tIns="0" rIns="0" bIns="0" anchor="t">
-            <a:spAutoFit/>
-          </a:bodyPr>
-          <a:lstStyle/>
-          <a:p>
-            <a:pPr algn="l"/>
-            <a:r>
-              <a:rPr sz="1200" b="0" i="0" u="none">
-                <a:solidFill>
-                  <a:srgbClr val="000000"/>
-                </a:solidFill>
-                <a:latin typeface="Hind Siliguri"/>
-              </a:rPr>
-              <a:t>Source: </a:t>
-            </a:r>
-            <a:r>
-              <a:rPr sz="1200" b="0" i="0" u="none">
-                <a:solidFill>
-                  <a:srgbClr val="4F46E5"/>
-                </a:solidFill>
-                <a:latin typeface="Hind Siliguri"/>
-              </a:rPr>
-              <a:t>soundcertified.com</a:t>
             </a:r>
           </a:p>
         </p:txBody>
@@ -7836,7 +5625,7 @@
         <p:spPr>
           <a:xfrm>
             <a:off x="2559843" y="4111823"/>
-            <a:ext cx="7072312" cy="371475"/>
+            <a:ext cx="7072312" cy="984885"/>
           </a:xfrm>
           <a:prstGeom prst="rect">
             <a:avLst/>
@@ -7851,14 +5640,146 @@
           <a:p>
             <a:pPr algn="ctr"/>
             <a:r>
-              <a:rPr sz="1800" b="0" i="0" u="none">
-                <a:solidFill>
-                  <a:srgbClr val="475569"/>
-                </a:solidFill>
-                <a:latin typeface="Hind Siliguri"/>
-              </a:rPr>
-              <a:t>মূল ক্যাটাগরি: ইনপুট, প্রসেসিং, মেমোরি/স্টোরেজ ও আউটপুট ডিভাইস</a:t>
-            </a:r>
+              <a:rPr sz="3200" b="0" i="0" u="none" dirty="0" err="1">
+                <a:solidFill>
+                  <a:srgbClr val="475569"/>
+                </a:solidFill>
+                <a:latin typeface="Hind Siliguri"/>
+              </a:rPr>
+              <a:t>মূল</a:t>
+            </a:r>
+            <a:r>
+              <a:rPr sz="3200" b="0" i="0" u="none" dirty="0">
+                <a:solidFill>
+                  <a:srgbClr val="475569"/>
+                </a:solidFill>
+                <a:latin typeface="Hind Siliguri"/>
+              </a:rPr>
+              <a:t> </a:t>
+            </a:r>
+            <a:r>
+              <a:rPr sz="3200" b="0" i="0" u="none" dirty="0" err="1">
+                <a:solidFill>
+                  <a:srgbClr val="475569"/>
+                </a:solidFill>
+                <a:latin typeface="Hind Siliguri"/>
+              </a:rPr>
+              <a:t>ক্যাটাগরি</a:t>
+            </a:r>
+            <a:r>
+              <a:rPr sz="3200" b="0" i="0" u="none" dirty="0">
+                <a:solidFill>
+                  <a:srgbClr val="475569"/>
+                </a:solidFill>
+                <a:latin typeface="Hind Siliguri"/>
+              </a:rPr>
+              <a:t>: </a:t>
+            </a:r>
+            <a:r>
+              <a:rPr sz="3200" b="0" i="0" u="none" dirty="0" err="1">
+                <a:solidFill>
+                  <a:srgbClr val="475569"/>
+                </a:solidFill>
+                <a:latin typeface="Hind Siliguri"/>
+              </a:rPr>
+              <a:t>ইনপুট</a:t>
+            </a:r>
+            <a:r>
+              <a:rPr sz="3200" b="0" i="0" u="none" dirty="0">
+                <a:solidFill>
+                  <a:srgbClr val="475569"/>
+                </a:solidFill>
+                <a:latin typeface="Hind Siliguri"/>
+              </a:rPr>
+              <a:t>, </a:t>
+            </a:r>
+            <a:r>
+              <a:rPr sz="3200" b="0" i="0" u="none" dirty="0" err="1">
+                <a:solidFill>
+                  <a:srgbClr val="475569"/>
+                </a:solidFill>
+                <a:latin typeface="Hind Siliguri"/>
+              </a:rPr>
+              <a:t>প্রসেসিং</a:t>
+            </a:r>
+            <a:r>
+              <a:rPr sz="3200" b="0" i="0" u="none" dirty="0">
+                <a:solidFill>
+                  <a:srgbClr val="475569"/>
+                </a:solidFill>
+                <a:latin typeface="Hind Siliguri"/>
+              </a:rPr>
+              <a:t>, </a:t>
+            </a:r>
+            <a:r>
+              <a:rPr sz="3200" b="0" i="0" u="none" dirty="0" err="1">
+                <a:solidFill>
+                  <a:srgbClr val="475569"/>
+                </a:solidFill>
+                <a:latin typeface="Hind Siliguri"/>
+              </a:rPr>
+              <a:t>মেমোরি</a:t>
+            </a:r>
+            <a:r>
+              <a:rPr sz="3200" b="0" i="0" u="none" dirty="0">
+                <a:solidFill>
+                  <a:srgbClr val="475569"/>
+                </a:solidFill>
+                <a:latin typeface="Hind Siliguri"/>
+              </a:rPr>
+              <a:t>/</a:t>
+            </a:r>
+            <a:r>
+              <a:rPr sz="3200" b="0" i="0" u="none" dirty="0" err="1">
+                <a:solidFill>
+                  <a:srgbClr val="475569"/>
+                </a:solidFill>
+                <a:latin typeface="Hind Siliguri"/>
+              </a:rPr>
+              <a:t>স্টোরেজ</a:t>
+            </a:r>
+            <a:r>
+              <a:rPr sz="3200" b="0" i="0" u="none" dirty="0">
+                <a:solidFill>
+                  <a:srgbClr val="475569"/>
+                </a:solidFill>
+                <a:latin typeface="Hind Siliguri"/>
+              </a:rPr>
+              <a:t> ও </a:t>
+            </a:r>
+            <a:r>
+              <a:rPr sz="3200" b="0" i="0" u="none" dirty="0" err="1">
+                <a:solidFill>
+                  <a:srgbClr val="475569"/>
+                </a:solidFill>
+                <a:latin typeface="Hind Siliguri"/>
+              </a:rPr>
+              <a:t>আউটপুট</a:t>
+            </a:r>
+            <a:r>
+              <a:rPr sz="3200" b="0" i="0" u="none" dirty="0">
+                <a:solidFill>
+                  <a:srgbClr val="475569"/>
+                </a:solidFill>
+                <a:latin typeface="Hind Siliguri"/>
+              </a:rPr>
+              <a:t> </a:t>
+            </a:r>
+            <a:r>
+              <a:rPr sz="3200" b="0" i="0" u="none" dirty="0" err="1">
+                <a:solidFill>
+                  <a:srgbClr val="475569"/>
+                </a:solidFill>
+                <a:latin typeface="Hind Siliguri"/>
+              </a:rPr>
+              <a:t>ডিভাইস</a:t>
+            </a:r>
+            <a:endParaRPr sz="3200" b="0" i="0" u="none" dirty="0">
+              <a:solidFill>
+                <a:srgbClr val="475569"/>
+              </a:solidFill>
+              <a:latin typeface="Hind Siliguri"/>
+            </a:endParaRPr>
           </a:p>
         </p:txBody>
       </p:sp>
@@ -8089,7 +6010,7 @@
         <p:spPr>
           <a:xfrm>
             <a:off x="6534150" y="2697360"/>
-            <a:ext cx="5150643" cy="342900"/>
+            <a:ext cx="5150643" cy="369332"/>
           </a:xfrm>
           <a:prstGeom prst="rect">
             <a:avLst/>
@@ -8104,14 +6025,56 @@
           <a:p>
             <a:pPr algn="l"/>
             <a:r>
-              <a:rPr sz="1650" b="1" i="0" u="none">
+              <a:rPr sz="2400" b="1" i="0" u="none" dirty="0" err="1">
                 <a:solidFill>
                   <a:srgbClr val="0284C7"/>
                 </a:solidFill>
                 <a:latin typeface="Hind Siliguri"/>
               </a:rPr>
-              <a:t>প্রধান ইনপুট মাধ্যম</a:t>
-            </a:r>
+              <a:t>প্রধান</a:t>
+            </a:r>
+            <a:r>
+              <a:rPr sz="2400" b="1" i="0" u="none" dirty="0">
+                <a:solidFill>
+                  <a:srgbClr val="0284C7"/>
+                </a:solidFill>
+                <a:latin typeface="Hind Siliguri"/>
+              </a:rPr>
+              <a:t> </a:t>
+            </a:r>
+            <a:r>
+              <a:rPr sz="2400" b="1" i="0" u="none" dirty="0" err="1">
+                <a:solidFill>
+                  <a:srgbClr val="0284C7"/>
+                </a:solidFill>
+                <a:latin typeface="Hind Siliguri"/>
+              </a:rPr>
+              <a:t>ইনপুট</a:t>
+            </a:r>
+            <a:r>
+              <a:rPr sz="2400" b="1" i="0" u="none" dirty="0">
+                <a:solidFill>
+                  <a:srgbClr val="0284C7"/>
+                </a:solidFill>
+                <a:latin typeface="Hind Siliguri"/>
+              </a:rPr>
+              <a:t> </a:t>
+            </a:r>
+            <a:r>
+              <a:rPr sz="2400" b="1" i="0" u="none" dirty="0" err="1">
+                <a:solidFill>
+                  <a:srgbClr val="0284C7"/>
+                </a:solidFill>
+                <a:latin typeface="Hind Siliguri"/>
+              </a:rPr>
+              <a:t>মাধ্যম</a:t>
+            </a:r>
+            <a:endParaRPr sz="2400" b="1" i="0" u="none" dirty="0">
+              <a:solidFill>
+                <a:srgbClr val="0284C7"/>
+              </a:solidFill>
+              <a:latin typeface="Hind Siliguri"/>
+            </a:endParaRPr>
           </a:p>
         </p:txBody>
       </p:sp>
@@ -8124,7 +6087,7 @@
         <p:spPr>
           <a:xfrm>
             <a:off x="6534150" y="3116460"/>
-            <a:ext cx="4905375" cy="276225"/>
+            <a:ext cx="4905375" cy="615553"/>
           </a:xfrm>
           <a:prstGeom prst="rect">
             <a:avLst/>
@@ -8139,13 +6102,166 @@
           <a:p>
             <a:pPr algn="l"/>
             <a:r>
-              <a:rPr sz="1350" b="0" i="0" u="none">
-                <a:solidFill>
-                  <a:srgbClr val="475569"/>
-                </a:solidFill>
-                <a:latin typeface="Hind Siliguri"/>
-              </a:rPr>
-              <a:t>টেক্সট, সংখ্যা ও বিশেষ নির্দেশ দেওয়ার জন্য সর্বাধিক ব্যবহৃত ডিভাইস।</a:t>
+              <a:rPr sz="2000" b="0" i="0" u="none" dirty="0" err="1">
+                <a:solidFill>
+                  <a:srgbClr val="475569"/>
+                </a:solidFill>
+                <a:latin typeface="Hind Siliguri"/>
+              </a:rPr>
+              <a:t>টেক্সট</a:t>
+            </a:r>
+            <a:r>
+              <a:rPr sz="2000" b="0" i="0" u="none" dirty="0">
+                <a:solidFill>
+                  <a:srgbClr val="475569"/>
+                </a:solidFill>
+                <a:latin typeface="Hind Siliguri"/>
+              </a:rPr>
+              <a:t>, </a:t>
+            </a:r>
+            <a:r>
+              <a:rPr sz="2000" b="0" i="0" u="none" dirty="0" err="1">
+                <a:solidFill>
+                  <a:srgbClr val="475569"/>
+                </a:solidFill>
+                <a:latin typeface="Hind Siliguri"/>
+              </a:rPr>
+              <a:t>সংখ্যা</a:t>
+            </a:r>
+            <a:r>
+              <a:rPr sz="2000" b="0" i="0" u="none" dirty="0">
+                <a:solidFill>
+                  <a:srgbClr val="475569"/>
+                </a:solidFill>
+                <a:latin typeface="Hind Siliguri"/>
+              </a:rPr>
+              <a:t> ও </a:t>
+            </a:r>
+            <a:r>
+              <a:rPr sz="2000" b="0" i="0" u="none" dirty="0" err="1">
+                <a:solidFill>
+                  <a:srgbClr val="475569"/>
+                </a:solidFill>
+                <a:latin typeface="Hind Siliguri"/>
+              </a:rPr>
+              <a:t>বিশেষ</a:t>
+            </a:r>
+            <a:r>
+              <a:rPr sz="2000" b="0" i="0" u="none" dirty="0">
+                <a:solidFill>
+                  <a:srgbClr val="475569"/>
+                </a:solidFill>
+                <a:latin typeface="Hind Siliguri"/>
+              </a:rPr>
+              <a:t> </a:t>
+            </a:r>
+            <a:r>
+              <a:rPr sz="2000" b="0" i="0" u="none" dirty="0" err="1">
+                <a:solidFill>
+                  <a:srgbClr val="475569"/>
+                </a:solidFill>
+                <a:latin typeface="Hind Siliguri"/>
+              </a:rPr>
+              <a:t>নির্দেশ</a:t>
+            </a:r>
+            <a:r>
+              <a:rPr sz="2000" b="0" i="0" u="none" dirty="0">
+                <a:solidFill>
+                  <a:srgbClr val="475569"/>
+                </a:solidFill>
+                <a:latin typeface="Hind Siliguri"/>
+              </a:rPr>
+              <a:t> </a:t>
+            </a:r>
+            <a:r>
+              <a:rPr sz="2000" b="0" i="0" u="none" dirty="0" err="1">
+                <a:solidFill>
+                  <a:srgbClr val="475569"/>
+                </a:solidFill>
+                <a:latin typeface="Hind Siliguri"/>
+              </a:rPr>
+              <a:t>দেওয়ার</a:t>
+            </a:r>
+            <a:r>
+              <a:rPr sz="2000" b="0" i="0" u="none" dirty="0">
+                <a:solidFill>
+                  <a:srgbClr val="475569"/>
+                </a:solidFill>
+                <a:latin typeface="Hind Siliguri"/>
+              </a:rPr>
+              <a:t> </a:t>
+            </a:r>
+            <a:r>
+              <a:rPr sz="2000" b="0" i="0" u="none" dirty="0" err="1">
+                <a:solidFill>
+                  <a:srgbClr val="475569"/>
+                </a:solidFill>
+                <a:latin typeface="Hind Siliguri"/>
+              </a:rPr>
+              <a:t>জন্য</a:t>
+            </a:r>
+            <a:r>
+              <a:rPr sz="2000" b="0" i="0" u="none" dirty="0">
+                <a:solidFill>
+                  <a:srgbClr val="475569"/>
+                </a:solidFill>
+                <a:latin typeface="Hind Siliguri"/>
+              </a:rPr>
+              <a:t> </a:t>
+            </a:r>
+            <a:r>
+              <a:rPr sz="2000" b="0" i="0" u="none" dirty="0" err="1">
+                <a:solidFill>
+                  <a:srgbClr val="475569"/>
+                </a:solidFill>
+                <a:latin typeface="Hind Siliguri"/>
+              </a:rPr>
+              <a:t>সর্বাধিক</a:t>
+            </a:r>
+            <a:r>
+              <a:rPr sz="2000" b="0" i="0" u="none" dirty="0">
+                <a:solidFill>
+                  <a:srgbClr val="475569"/>
+                </a:solidFill>
+                <a:latin typeface="Hind Siliguri"/>
+              </a:rPr>
+              <a:t> </a:t>
+            </a:r>
+            <a:r>
+              <a:rPr sz="2000" b="0" i="0" u="none" dirty="0" err="1">
+                <a:solidFill>
+                  <a:srgbClr val="475569"/>
+                </a:solidFill>
+                <a:latin typeface="Hind Siliguri"/>
+              </a:rPr>
+              <a:t>ব্যবহৃত</a:t>
+            </a:r>
+            <a:r>
+              <a:rPr sz="2000" b="0" i="0" u="none" dirty="0">
+                <a:solidFill>
+                  <a:srgbClr val="475569"/>
+                </a:solidFill>
+                <a:latin typeface="Hind Siliguri"/>
+              </a:rPr>
+              <a:t> </a:t>
+            </a:r>
+            <a:r>
+              <a:rPr sz="2000" b="0" i="0" u="none" dirty="0" err="1">
+                <a:solidFill>
+                  <a:srgbClr val="475569"/>
+                </a:solidFill>
+                <a:latin typeface="Hind Siliguri"/>
+              </a:rPr>
+              <a:t>ডিভাইস</a:t>
+            </a:r>
+            <a:r>
+              <a:rPr sz="2000" b="0" i="0" u="none" dirty="0">
+                <a:solidFill>
+                  <a:srgbClr val="475569"/>
+                </a:solidFill>
+                <a:latin typeface="Hind Siliguri"/>
+              </a:rPr>
+              <a:t>।</a:t>
             </a:r>
           </a:p>
         </p:txBody>
@@ -8159,7 +6275,7 @@
         <p:spPr>
           <a:xfrm>
             <a:off x="6534150" y="4059435"/>
-            <a:ext cx="5150643" cy="342900"/>
+            <a:ext cx="5150643" cy="369332"/>
           </a:xfrm>
           <a:prstGeom prst="rect">
             <a:avLst/>
@@ -8174,14 +6290,38 @@
           <a:p>
             <a:pPr algn="l"/>
             <a:r>
-              <a:rPr sz="1650" b="1" i="0" u="none">
+              <a:rPr sz="2400" b="1" i="0" u="none" dirty="0" err="1">
                 <a:solidFill>
                   <a:srgbClr val="0284C7"/>
                 </a:solidFill>
                 <a:latin typeface="Hind Siliguri"/>
               </a:rPr>
-              <a:t>কী-এর বিন্যাস</a:t>
-            </a:r>
+              <a:t>কী-এর</a:t>
+            </a:r>
+            <a:r>
+              <a:rPr sz="2400" b="1" i="0" u="none" dirty="0">
+                <a:solidFill>
+                  <a:srgbClr val="0284C7"/>
+                </a:solidFill>
+                <a:latin typeface="Hind Siliguri"/>
+              </a:rPr>
+              <a:t> </a:t>
+            </a:r>
+            <a:r>
+              <a:rPr sz="2400" b="1" i="0" u="none" dirty="0" err="1">
+                <a:solidFill>
+                  <a:srgbClr val="0284C7"/>
+                </a:solidFill>
+                <a:latin typeface="Hind Siliguri"/>
+              </a:rPr>
+              <a:t>বিন্যাস</a:t>
+            </a:r>
+            <a:endParaRPr sz="2400" b="1" i="0" u="none" dirty="0">
+              <a:solidFill>
+                <a:srgbClr val="0284C7"/>
+              </a:solidFill>
+              <a:latin typeface="Hind Siliguri"/>
+            </a:endParaRPr>
           </a:p>
         </p:txBody>
       </p:sp>
@@ -8194,7 +6334,7 @@
         <p:spPr>
           <a:xfrm>
             <a:off x="6534150" y="4478535"/>
-            <a:ext cx="4905375" cy="276225"/>
+            <a:ext cx="4905375" cy="738664"/>
           </a:xfrm>
           <a:prstGeom prst="rect">
             <a:avLst/>
@@ -8209,13 +6349,148 @@
           <a:p>
             <a:pPr algn="l"/>
             <a:r>
-              <a:rPr sz="1350" b="0" i="0" u="none">
-                <a:solidFill>
-                  <a:srgbClr val="475569"/>
-                </a:solidFill>
-                <a:latin typeface="Hind Siliguri"/>
-              </a:rPr>
-              <a:t>ফাংশন কী, আলফানিউমেরিক কী, কার্সর কী ও নিউমেরিক কী-প্যাড।</a:t>
+              <a:rPr sz="2400" b="0" i="0" u="none" dirty="0" err="1">
+                <a:solidFill>
+                  <a:srgbClr val="475569"/>
+                </a:solidFill>
+                <a:latin typeface="Hind Siliguri"/>
+              </a:rPr>
+              <a:t>ফাংশন</a:t>
+            </a:r>
+            <a:r>
+              <a:rPr sz="2400" b="0" i="0" u="none" dirty="0">
+                <a:solidFill>
+                  <a:srgbClr val="475569"/>
+                </a:solidFill>
+                <a:latin typeface="Hind Siliguri"/>
+              </a:rPr>
+              <a:t> </a:t>
+            </a:r>
+            <a:r>
+              <a:rPr sz="2400" b="0" i="0" u="none" dirty="0" err="1">
+                <a:solidFill>
+                  <a:srgbClr val="475569"/>
+                </a:solidFill>
+                <a:latin typeface="Hind Siliguri"/>
+              </a:rPr>
+              <a:t>কী</a:t>
+            </a:r>
+            <a:r>
+              <a:rPr sz="2400" b="0" i="0" u="none" dirty="0">
+                <a:solidFill>
+                  <a:srgbClr val="475569"/>
+                </a:solidFill>
+                <a:latin typeface="Hind Siliguri"/>
+              </a:rPr>
+              <a:t>, </a:t>
+            </a:r>
+            <a:r>
+              <a:rPr sz="2400" b="0" i="0" u="none" dirty="0" err="1">
+                <a:solidFill>
+                  <a:srgbClr val="475569"/>
+                </a:solidFill>
+                <a:latin typeface="Hind Siliguri"/>
+              </a:rPr>
+              <a:t>আলফানিউমেরিক</a:t>
+            </a:r>
+            <a:r>
+              <a:rPr sz="2400" b="0" i="0" u="none" dirty="0">
+                <a:solidFill>
+                  <a:srgbClr val="475569"/>
+                </a:solidFill>
+                <a:latin typeface="Hind Siliguri"/>
+              </a:rPr>
+              <a:t> </a:t>
+            </a:r>
+            <a:r>
+              <a:rPr sz="2400" b="0" i="0" u="none" dirty="0" err="1">
+                <a:solidFill>
+                  <a:srgbClr val="475569"/>
+                </a:solidFill>
+                <a:latin typeface="Hind Siliguri"/>
+              </a:rPr>
+              <a:t>কী</a:t>
+            </a:r>
+            <a:r>
+              <a:rPr sz="2400" b="0" i="0" u="none" dirty="0">
+                <a:solidFill>
+                  <a:srgbClr val="475569"/>
+                </a:solidFill>
+                <a:latin typeface="Hind Siliguri"/>
+              </a:rPr>
+              <a:t>, </a:t>
+            </a:r>
+            <a:r>
+              <a:rPr sz="2400" b="0" i="0" u="none" dirty="0" err="1">
+                <a:solidFill>
+                  <a:srgbClr val="475569"/>
+                </a:solidFill>
+                <a:latin typeface="Hind Siliguri"/>
+              </a:rPr>
+              <a:t>কার্সর</a:t>
+            </a:r>
+            <a:r>
+              <a:rPr sz="2400" b="0" i="0" u="none" dirty="0">
+                <a:solidFill>
+                  <a:srgbClr val="475569"/>
+                </a:solidFill>
+                <a:latin typeface="Hind Siliguri"/>
+              </a:rPr>
+              <a:t> </a:t>
+            </a:r>
+            <a:r>
+              <a:rPr sz="2400" b="0" i="0" u="none" dirty="0" err="1">
+                <a:solidFill>
+                  <a:srgbClr val="475569"/>
+                </a:solidFill>
+                <a:latin typeface="Hind Siliguri"/>
+              </a:rPr>
+              <a:t>কী</a:t>
+            </a:r>
+            <a:r>
+              <a:rPr sz="2400" b="0" i="0" u="none" dirty="0">
+                <a:solidFill>
+                  <a:srgbClr val="475569"/>
+                </a:solidFill>
+                <a:latin typeface="Hind Siliguri"/>
+              </a:rPr>
+              <a:t> ও </a:t>
+            </a:r>
+            <a:r>
+              <a:rPr sz="2400" b="0" i="0" u="none" dirty="0" err="1">
+                <a:solidFill>
+                  <a:srgbClr val="475569"/>
+                </a:solidFill>
+                <a:latin typeface="Hind Siliguri"/>
+              </a:rPr>
+              <a:t>নিউমেরিক</a:t>
+            </a:r>
+            <a:r>
+              <a:rPr sz="2400" b="0" i="0" u="none" dirty="0">
+                <a:solidFill>
+                  <a:srgbClr val="475569"/>
+                </a:solidFill>
+                <a:latin typeface="Hind Siliguri"/>
+              </a:rPr>
+              <a:t> </a:t>
+            </a:r>
+            <a:r>
+              <a:rPr sz="2400" b="0" i="0" u="none" dirty="0" err="1">
+                <a:solidFill>
+                  <a:srgbClr val="475569"/>
+                </a:solidFill>
+                <a:latin typeface="Hind Siliguri"/>
+              </a:rPr>
+              <a:t>কী-প্যাড</a:t>
+            </a:r>
+            <a:r>
+              <a:rPr sz="2400" b="0" i="0" u="none" dirty="0">
+                <a:solidFill>
+                  <a:srgbClr val="475569"/>
+                </a:solidFill>
+                <a:latin typeface="Hind Siliguri"/>
+              </a:rPr>
+              <a:t>।</a:t>
             </a:r>
           </a:p>
         </p:txBody>
@@ -8447,7 +6722,7 @@
         <p:spPr>
           <a:xfrm>
             <a:off x="847725" y="2697360"/>
-            <a:ext cx="5150643" cy="342900"/>
+            <a:ext cx="5150643" cy="307777"/>
           </a:xfrm>
           <a:prstGeom prst="rect">
             <a:avLst/>
@@ -8462,14 +6737,38 @@
           <a:p>
             <a:pPr algn="l"/>
             <a:r>
-              <a:rPr sz="1650" b="1" i="0" u="none">
+              <a:rPr sz="2000" b="1" i="0" u="none" dirty="0" err="1">
                 <a:solidFill>
                   <a:srgbClr val="0284C7"/>
                 </a:solidFill>
                 <a:latin typeface="Hind Siliguri"/>
               </a:rPr>
-              <a:t>পয়েন্টিং ডিভাইস</a:t>
-            </a:r>
+              <a:t>পয়েন্টিং</a:t>
+            </a:r>
+            <a:r>
+              <a:rPr sz="2000" b="1" i="0" u="none" dirty="0">
+                <a:solidFill>
+                  <a:srgbClr val="0284C7"/>
+                </a:solidFill>
+                <a:latin typeface="Hind Siliguri"/>
+              </a:rPr>
+              <a:t> </a:t>
+            </a:r>
+            <a:r>
+              <a:rPr sz="2000" b="1" i="0" u="none" dirty="0" err="1">
+                <a:solidFill>
+                  <a:srgbClr val="0284C7"/>
+                </a:solidFill>
+                <a:latin typeface="Hind Siliguri"/>
+              </a:rPr>
+              <a:t>ডিভাইস</a:t>
+            </a:r>
+            <a:endParaRPr sz="2000" b="1" i="0" u="none" dirty="0">
+              <a:solidFill>
+                <a:srgbClr val="0284C7"/>
+              </a:solidFill>
+              <a:latin typeface="Hind Siliguri"/>
+            </a:endParaRPr>
           </a:p>
         </p:txBody>
       </p:sp>
@@ -8482,7 +6781,7 @@
         <p:spPr>
           <a:xfrm>
             <a:off x="847725" y="3116460"/>
-            <a:ext cx="4905375" cy="276225"/>
+            <a:ext cx="4905375" cy="615553"/>
           </a:xfrm>
           <a:prstGeom prst="rect">
             <a:avLst/>
@@ -8497,13 +6796,166 @@
           <a:p>
             <a:pPr algn="l"/>
             <a:r>
-              <a:rPr sz="1350" b="0" i="0" u="none">
-                <a:solidFill>
-                  <a:srgbClr val="475569"/>
-                </a:solidFill>
-                <a:latin typeface="Hind Siliguri"/>
-              </a:rPr>
-              <a:t>কম্পিউটার স্ক্রিনে কার্সর নাড়ানো ও আইকন সিলেক্ট করার দ্রুত মাধ্যম।</a:t>
+              <a:rPr sz="2000" b="0" i="0" u="none" dirty="0" err="1">
+                <a:solidFill>
+                  <a:srgbClr val="475569"/>
+                </a:solidFill>
+                <a:latin typeface="Hind Siliguri"/>
+              </a:rPr>
+              <a:t>কম্পিউটার</a:t>
+            </a:r>
+            <a:r>
+              <a:rPr sz="2000" b="0" i="0" u="none" dirty="0">
+                <a:solidFill>
+                  <a:srgbClr val="475569"/>
+                </a:solidFill>
+                <a:latin typeface="Hind Siliguri"/>
+              </a:rPr>
+              <a:t> </a:t>
+            </a:r>
+            <a:r>
+              <a:rPr sz="2000" b="0" i="0" u="none" dirty="0" err="1">
+                <a:solidFill>
+                  <a:srgbClr val="475569"/>
+                </a:solidFill>
+                <a:latin typeface="Hind Siliguri"/>
+              </a:rPr>
+              <a:t>স্ক্রিনে</a:t>
+            </a:r>
+            <a:r>
+              <a:rPr sz="2000" b="0" i="0" u="none" dirty="0">
+                <a:solidFill>
+                  <a:srgbClr val="475569"/>
+                </a:solidFill>
+                <a:latin typeface="Hind Siliguri"/>
+              </a:rPr>
+              <a:t> </a:t>
+            </a:r>
+            <a:r>
+              <a:rPr sz="2000" b="0" i="0" u="none" dirty="0" err="1">
+                <a:solidFill>
+                  <a:srgbClr val="475569"/>
+                </a:solidFill>
+                <a:latin typeface="Hind Siliguri"/>
+              </a:rPr>
+              <a:t>কার্সর</a:t>
+            </a:r>
+            <a:r>
+              <a:rPr sz="2000" b="0" i="0" u="none" dirty="0">
+                <a:solidFill>
+                  <a:srgbClr val="475569"/>
+                </a:solidFill>
+                <a:latin typeface="Hind Siliguri"/>
+              </a:rPr>
+              <a:t> </a:t>
+            </a:r>
+            <a:r>
+              <a:rPr sz="2000" b="0" i="0" u="none" dirty="0" err="1">
+                <a:solidFill>
+                  <a:srgbClr val="475569"/>
+                </a:solidFill>
+                <a:latin typeface="Hind Siliguri"/>
+              </a:rPr>
+              <a:t>নাড়ানো</a:t>
+            </a:r>
+            <a:r>
+              <a:rPr sz="2000" b="0" i="0" u="none" dirty="0">
+                <a:solidFill>
+                  <a:srgbClr val="475569"/>
+                </a:solidFill>
+                <a:latin typeface="Hind Siliguri"/>
+              </a:rPr>
+              <a:t> ও </a:t>
+            </a:r>
+            <a:r>
+              <a:rPr sz="2000" b="0" i="0" u="none" dirty="0" err="1">
+                <a:solidFill>
+                  <a:srgbClr val="475569"/>
+                </a:solidFill>
+                <a:latin typeface="Hind Siliguri"/>
+              </a:rPr>
+              <a:t>আইকন</a:t>
+            </a:r>
+            <a:r>
+              <a:rPr sz="2000" b="0" i="0" u="none" dirty="0">
+                <a:solidFill>
+                  <a:srgbClr val="475569"/>
+                </a:solidFill>
+                <a:latin typeface="Hind Siliguri"/>
+              </a:rPr>
+              <a:t> </a:t>
+            </a:r>
+            <a:r>
+              <a:rPr sz="2000" b="0" i="0" u="none" dirty="0" err="1">
+                <a:solidFill>
+                  <a:srgbClr val="475569"/>
+                </a:solidFill>
+                <a:latin typeface="Hind Siliguri"/>
+              </a:rPr>
+              <a:t>সিলেক্ট</a:t>
+            </a:r>
+            <a:r>
+              <a:rPr sz="2000" b="0" i="0" u="none" dirty="0">
+                <a:solidFill>
+                  <a:srgbClr val="475569"/>
+                </a:solidFill>
+                <a:latin typeface="Hind Siliguri"/>
+              </a:rPr>
+              <a:t> </a:t>
+            </a:r>
+            <a:r>
+              <a:rPr sz="2000" b="0" i="0" u="none" dirty="0" err="1">
+                <a:solidFill>
+                  <a:srgbClr val="475569"/>
+                </a:solidFill>
+                <a:latin typeface="Hind Siliguri"/>
+              </a:rPr>
+              <a:t>করার</a:t>
+            </a:r>
+            <a:r>
+              <a:rPr sz="2000" b="0" i="0" u="none" dirty="0">
+                <a:solidFill>
+                  <a:srgbClr val="475569"/>
+                </a:solidFill>
+                <a:latin typeface="Hind Siliguri"/>
+              </a:rPr>
+              <a:t> </a:t>
+            </a:r>
+            <a:r>
+              <a:rPr sz="2000" b="0" i="0" u="none" dirty="0" err="1">
+                <a:solidFill>
+                  <a:srgbClr val="475569"/>
+                </a:solidFill>
+                <a:latin typeface="Hind Siliguri"/>
+              </a:rPr>
+              <a:t>দ্রুত</a:t>
+            </a:r>
+            <a:r>
+              <a:rPr sz="2000" b="0" i="0" u="none" dirty="0">
+                <a:solidFill>
+                  <a:srgbClr val="475569"/>
+                </a:solidFill>
+                <a:latin typeface="Hind Siliguri"/>
+              </a:rPr>
+              <a:t> </a:t>
+            </a:r>
+            <a:r>
+              <a:rPr sz="2000" b="0" i="0" u="none" dirty="0" err="1">
+                <a:solidFill>
+                  <a:srgbClr val="475569"/>
+                </a:solidFill>
+                <a:latin typeface="Hind Siliguri"/>
+              </a:rPr>
+              <a:t>মাধ্যম</a:t>
+            </a:r>
+            <a:r>
+              <a:rPr sz="2000" b="0" i="0" u="none" dirty="0">
+                <a:solidFill>
+                  <a:srgbClr val="475569"/>
+                </a:solidFill>
+                <a:latin typeface="Hind Siliguri"/>
+              </a:rPr>
+              <a:t>।</a:t>
             </a:r>
           </a:p>
         </p:txBody>
@@ -8517,7 +6969,7 @@
         <p:spPr>
           <a:xfrm>
             <a:off x="847725" y="4059435"/>
-            <a:ext cx="5150643" cy="342900"/>
+            <a:ext cx="5150643" cy="369332"/>
           </a:xfrm>
           <a:prstGeom prst="rect">
             <a:avLst/>
@@ -8532,7 +6984,7 @@
           <a:p>
             <a:pPr algn="l"/>
             <a:r>
-              <a:rPr sz="1650" b="1" i="0" u="none">
+              <a:rPr sz="2400" b="1" i="0" u="none" dirty="0" err="1">
                 <a:solidFill>
                   <a:srgbClr val="0284C7"/>
                 </a:solidFill>
@@ -8540,6 +6992,12 @@
               </a:rPr>
               <a:t>কার্যপদ্ধতি</a:t>
             </a:r>
+            <a:endParaRPr sz="2400" b="1" i="0" u="none" dirty="0">
+              <a:solidFill>
+                <a:srgbClr val="0284C7"/>
+              </a:solidFill>
+              <a:latin typeface="Hind Siliguri"/>
+            </a:endParaRPr>
           </a:p>
         </p:txBody>
       </p:sp>
@@ -8552,7 +7010,7 @@
         <p:spPr>
           <a:xfrm>
             <a:off x="847725" y="4478535"/>
-            <a:ext cx="4905375" cy="276225"/>
+            <a:ext cx="4905375" cy="307777"/>
           </a:xfrm>
           <a:prstGeom prst="rect">
             <a:avLst/>
@@ -8567,7 +7025,7 @@
           <a:p>
             <a:pPr algn="l"/>
             <a:r>
-              <a:rPr sz="1350" b="0" i="0" u="none">
+              <a:rPr sz="2000" b="0" i="0" u="none">
                 <a:solidFill>
                   <a:srgbClr val="475569"/>
                 </a:solidFill>
@@ -8656,7 +7114,7 @@
           <a:lstStyle/>
           <a:p>
             <a:pPr algn="ctr"/>
-            <a:endParaRPr/>
+            <a:endParaRPr sz="2800"/>
           </a:p>
         </p:txBody>
       </p:sp>
@@ -8805,7 +7263,7 @@
         <p:spPr>
           <a:xfrm>
             <a:off x="6534150" y="2697360"/>
-            <a:ext cx="5150643" cy="342900"/>
+            <a:ext cx="5150643" cy="369332"/>
           </a:xfrm>
           <a:prstGeom prst="rect">
             <a:avLst/>
@@ -8820,14 +7278,56 @@
           <a:p>
             <a:pPr algn="l"/>
             <a:r>
-              <a:rPr sz="1650" b="1" i="0" u="none">
+              <a:rPr sz="2400" b="1" i="0" u="none" dirty="0" err="1">
                 <a:solidFill>
                   <a:srgbClr val="0284C7"/>
                 </a:solidFill>
                 <a:latin typeface="Hind Siliguri"/>
               </a:rPr>
-              <a:t>শব্দ ইনপুট মাধ্যম</a:t>
-            </a:r>
+              <a:t>শব্দ</a:t>
+            </a:r>
+            <a:r>
+              <a:rPr sz="2400" b="1" i="0" u="none" dirty="0">
+                <a:solidFill>
+                  <a:srgbClr val="0284C7"/>
+                </a:solidFill>
+                <a:latin typeface="Hind Siliguri"/>
+              </a:rPr>
+              <a:t> </a:t>
+            </a:r>
+            <a:r>
+              <a:rPr sz="2400" b="1" i="0" u="none" dirty="0" err="1">
+                <a:solidFill>
+                  <a:srgbClr val="0284C7"/>
+                </a:solidFill>
+                <a:latin typeface="Hind Siliguri"/>
+              </a:rPr>
+              <a:t>ইনপুট</a:t>
+            </a:r>
+            <a:r>
+              <a:rPr sz="2400" b="1" i="0" u="none" dirty="0">
+                <a:solidFill>
+                  <a:srgbClr val="0284C7"/>
+                </a:solidFill>
+                <a:latin typeface="Hind Siliguri"/>
+              </a:rPr>
+              <a:t> </a:t>
+            </a:r>
+            <a:r>
+              <a:rPr sz="2400" b="1" i="0" u="none" dirty="0" err="1">
+                <a:solidFill>
+                  <a:srgbClr val="0284C7"/>
+                </a:solidFill>
+                <a:latin typeface="Hind Siliguri"/>
+              </a:rPr>
+              <a:t>মাধ্যম</a:t>
+            </a:r>
+            <a:endParaRPr sz="2400" b="1" i="0" u="none" dirty="0">
+              <a:solidFill>
+                <a:srgbClr val="0284C7"/>
+              </a:solidFill>
+              <a:latin typeface="Hind Siliguri"/>
+            </a:endParaRPr>
           </a:p>
         </p:txBody>
       </p:sp>
@@ -8840,7 +7340,7 @@
         <p:spPr>
           <a:xfrm>
             <a:off x="6534150" y="3116460"/>
-            <a:ext cx="4905375" cy="276225"/>
+            <a:ext cx="4905375" cy="307777"/>
           </a:xfrm>
           <a:prstGeom prst="rect">
             <a:avLst/>
@@ -8855,13 +7355,166 @@
           <a:p>
             <a:pPr algn="l"/>
             <a:r>
-              <a:rPr sz="1350" b="0" i="0" u="none">
-                <a:solidFill>
-                  <a:srgbClr val="475569"/>
-                </a:solidFill>
-                <a:latin typeface="Hind Siliguri"/>
-              </a:rPr>
-              <a:t>ভয়েস বা কণ্ঠস্বর ডিজিটাল তরঙ্গে রূপান্তর করে কম্পিউটারে পাঠায়।</a:t>
+              <a:rPr sz="2000" b="0" i="0" u="none" dirty="0" err="1">
+                <a:solidFill>
+                  <a:srgbClr val="475569"/>
+                </a:solidFill>
+                <a:latin typeface="Hind Siliguri"/>
+              </a:rPr>
+              <a:t>ভয়েস</a:t>
+            </a:r>
+            <a:r>
+              <a:rPr sz="2000" b="0" i="0" u="none" dirty="0">
+                <a:solidFill>
+                  <a:srgbClr val="475569"/>
+                </a:solidFill>
+                <a:latin typeface="Hind Siliguri"/>
+              </a:rPr>
+              <a:t> </a:t>
+            </a:r>
+            <a:r>
+              <a:rPr sz="2000" b="0" i="0" u="none" dirty="0" err="1">
+                <a:solidFill>
+                  <a:srgbClr val="475569"/>
+                </a:solidFill>
+                <a:latin typeface="Hind Siliguri"/>
+              </a:rPr>
+              <a:t>বা</a:t>
+            </a:r>
+            <a:r>
+              <a:rPr sz="2000" b="0" i="0" u="none" dirty="0">
+                <a:solidFill>
+                  <a:srgbClr val="475569"/>
+                </a:solidFill>
+                <a:latin typeface="Hind Siliguri"/>
+              </a:rPr>
+              <a:t> </a:t>
+            </a:r>
+            <a:r>
+              <a:rPr sz="2000" b="0" i="0" u="none" dirty="0" err="1">
+                <a:solidFill>
+                  <a:srgbClr val="475569"/>
+                </a:solidFill>
+                <a:latin typeface="Hind Siliguri"/>
+              </a:rPr>
+              <a:t>কণ্ঠস্বর</a:t>
+            </a:r>
+            <a:r>
+              <a:rPr sz="2000" b="0" i="0" u="none" dirty="0">
+                <a:solidFill>
+                  <a:srgbClr val="475569"/>
+                </a:solidFill>
+                <a:latin typeface="Hind Siliguri"/>
+              </a:rPr>
+              <a:t> </a:t>
+            </a:r>
+            <a:r>
+              <a:rPr sz="2000" b="0" i="0" u="none" dirty="0" err="1">
+                <a:solidFill>
+                  <a:srgbClr val="475569"/>
+                </a:solidFill>
+                <a:latin typeface="Hind Siliguri"/>
+              </a:rPr>
+              <a:t>ডিজিটাল</a:t>
+            </a:r>
+            <a:r>
+              <a:rPr sz="2000" b="0" i="0" u="none" dirty="0">
+                <a:solidFill>
+                  <a:srgbClr val="475569"/>
+                </a:solidFill>
+                <a:latin typeface="Hind Siliguri"/>
+              </a:rPr>
+              <a:t> </a:t>
+            </a:r>
+            <a:r>
+              <a:rPr sz="2000" b="0" i="0" u="none" dirty="0" err="1">
+                <a:solidFill>
+                  <a:srgbClr val="475569"/>
+                </a:solidFill>
+                <a:latin typeface="Hind Siliguri"/>
+              </a:rPr>
+              <a:t>তরঙ্গে</a:t>
+            </a:r>
+            <a:r>
+              <a:rPr sz="2000" b="0" i="0" u="none" dirty="0">
+                <a:solidFill>
+                  <a:srgbClr val="475569"/>
+                </a:solidFill>
+                <a:latin typeface="Hind Siliguri"/>
+              </a:rPr>
+              <a:t> </a:t>
+            </a:r>
+            <a:r>
+              <a:rPr sz="2000" b="0" i="0" u="none" dirty="0" err="1">
+                <a:solidFill>
+                  <a:srgbClr val="475569"/>
+                </a:solidFill>
+                <a:latin typeface="Hind Siliguri"/>
+              </a:rPr>
+              <a:t>রূপান্তর</a:t>
+            </a:r>
+            <a:r>
+              <a:rPr sz="2000" b="0" i="0" u="none" dirty="0">
+                <a:solidFill>
+                  <a:srgbClr val="475569"/>
+                </a:solidFill>
+                <a:latin typeface="Hind Siliguri"/>
+              </a:rPr>
+              <a:t> </a:t>
+            </a:r>
+            <a:r>
+              <a:rPr sz="2000" b="0" i="0" u="none" dirty="0" err="1">
+                <a:solidFill>
+                  <a:srgbClr val="475569"/>
+                </a:solidFill>
+                <a:latin typeface="Hind Siliguri"/>
+              </a:rPr>
+              <a:t>করে</a:t>
+            </a:r>
+            <a:r>
+              <a:rPr sz="2000" b="0" i="0" u="none" dirty="0">
+                <a:solidFill>
+                  <a:srgbClr val="475569"/>
+                </a:solidFill>
+                <a:latin typeface="Hind Siliguri"/>
+              </a:rPr>
+              <a:t> </a:t>
+            </a:r>
+            <a:r>
+              <a:rPr sz="2000" b="0" i="0" u="none" dirty="0" err="1">
+                <a:solidFill>
+                  <a:srgbClr val="475569"/>
+                </a:solidFill>
+                <a:latin typeface="Hind Siliguri"/>
+              </a:rPr>
+              <a:t>কম্পিউটারে</a:t>
+            </a:r>
+            <a:r>
+              <a:rPr sz="2000" b="0" i="0" u="none" dirty="0">
+                <a:solidFill>
+                  <a:srgbClr val="475569"/>
+                </a:solidFill>
+                <a:latin typeface="Hind Siliguri"/>
+              </a:rPr>
+              <a:t> </a:t>
+            </a:r>
+            <a:r>
+              <a:rPr sz="2000" b="0" i="0" u="none" dirty="0" err="1">
+                <a:solidFill>
+                  <a:srgbClr val="475569"/>
+                </a:solidFill>
+                <a:latin typeface="Hind Siliguri"/>
+              </a:rPr>
+              <a:t>পাঠায়</a:t>
+            </a:r>
+            <a:r>
+              <a:rPr sz="2000" b="0" i="0" u="none" dirty="0">
+                <a:solidFill>
+                  <a:srgbClr val="475569"/>
+                </a:solidFill>
+                <a:latin typeface="Hind Siliguri"/>
+              </a:rPr>
+              <a:t>।</a:t>
             </a:r>
           </a:p>
         </p:txBody>
@@ -8875,7 +7528,7 @@
         <p:spPr>
           <a:xfrm>
             <a:off x="6534150" y="4059435"/>
-            <a:ext cx="5150643" cy="342900"/>
+            <a:ext cx="5150643" cy="369332"/>
           </a:xfrm>
           <a:prstGeom prst="rect">
             <a:avLst/>
@@ -8890,14 +7543,38 @@
           <a:p>
             <a:pPr algn="l"/>
             <a:r>
-              <a:rPr sz="1650" b="1" i="0" u="none">
+              <a:rPr sz="2400" b="1" i="0" u="none" dirty="0" err="1">
                 <a:solidFill>
                   <a:srgbClr val="0284C7"/>
                 </a:solidFill>
                 <a:latin typeface="Hind Siliguri"/>
               </a:rPr>
-              <a:t>ব্যবহার ক্ষেত্র</a:t>
-            </a:r>
+              <a:t>ব্যবহার</a:t>
+            </a:r>
+            <a:r>
+              <a:rPr sz="2400" b="1" i="0" u="none" dirty="0">
+                <a:solidFill>
+                  <a:srgbClr val="0284C7"/>
+                </a:solidFill>
+                <a:latin typeface="Hind Siliguri"/>
+              </a:rPr>
+              <a:t> </a:t>
+            </a:r>
+            <a:r>
+              <a:rPr sz="2400" b="1" i="0" u="none" dirty="0" err="1">
+                <a:solidFill>
+                  <a:srgbClr val="0284C7"/>
+                </a:solidFill>
+                <a:latin typeface="Hind Siliguri"/>
+              </a:rPr>
+              <a:t>ক্ষেত্র</a:t>
+            </a:r>
+            <a:endParaRPr sz="2400" b="1" i="0" u="none" dirty="0">
+              <a:solidFill>
+                <a:srgbClr val="0284C7"/>
+              </a:solidFill>
+              <a:latin typeface="Hind Siliguri"/>
+            </a:endParaRPr>
           </a:p>
         </p:txBody>
       </p:sp>
@@ -8909,8 +7586,8 @@
         </p:nvSpPr>
         <p:spPr>
           <a:xfrm>
-            <a:off x="6534150" y="4478535"/>
-            <a:ext cx="4905375" cy="276225"/>
+            <a:off x="6534150" y="4578761"/>
+            <a:ext cx="4905375" cy="307777"/>
           </a:xfrm>
           <a:prstGeom prst="rect">
             <a:avLst/>
@@ -8925,13 +7602,166 @@
           <a:p>
             <a:pPr algn="l"/>
             <a:r>
-              <a:rPr sz="1350" b="0" i="0" u="none">
-                <a:solidFill>
-                  <a:srgbClr val="475569"/>
-                </a:solidFill>
-                <a:latin typeface="Hind Siliguri"/>
-              </a:rPr>
-              <a:t>অনলাইন ক্লাস, ভয়েস কল, মিটিং এবং ভয়েস রিকগনিশন সিস্টেম।</a:t>
+              <a:rPr sz="2000" b="0" i="0" u="none" dirty="0" err="1">
+                <a:solidFill>
+                  <a:srgbClr val="475569"/>
+                </a:solidFill>
+                <a:latin typeface="Hind Siliguri"/>
+              </a:rPr>
+              <a:t>অনলাইন</a:t>
+            </a:r>
+            <a:r>
+              <a:rPr sz="2000" b="0" i="0" u="none" dirty="0">
+                <a:solidFill>
+                  <a:srgbClr val="475569"/>
+                </a:solidFill>
+                <a:latin typeface="Hind Siliguri"/>
+              </a:rPr>
+              <a:t> </a:t>
+            </a:r>
+            <a:r>
+              <a:rPr sz="2000" b="0" i="0" u="none" dirty="0" err="1">
+                <a:solidFill>
+                  <a:srgbClr val="475569"/>
+                </a:solidFill>
+                <a:latin typeface="Hind Siliguri"/>
+              </a:rPr>
+              <a:t>ক্লাস</a:t>
+            </a:r>
+            <a:r>
+              <a:rPr sz="2000" b="0" i="0" u="none" dirty="0">
+                <a:solidFill>
+                  <a:srgbClr val="475569"/>
+                </a:solidFill>
+                <a:latin typeface="Hind Siliguri"/>
+              </a:rPr>
+              <a:t>, </a:t>
+            </a:r>
+            <a:r>
+              <a:rPr sz="2000" b="0" i="0" u="none" dirty="0" err="1">
+                <a:solidFill>
+                  <a:srgbClr val="475569"/>
+                </a:solidFill>
+                <a:latin typeface="Hind Siliguri"/>
+              </a:rPr>
+              <a:t>ভয়েস</a:t>
+            </a:r>
+            <a:r>
+              <a:rPr sz="2000" b="0" i="0" u="none" dirty="0">
+                <a:solidFill>
+                  <a:srgbClr val="475569"/>
+                </a:solidFill>
+                <a:latin typeface="Hind Siliguri"/>
+              </a:rPr>
+              <a:t> </a:t>
+            </a:r>
+            <a:r>
+              <a:rPr sz="2000" b="0" i="0" u="none" dirty="0" err="1">
+                <a:solidFill>
+                  <a:srgbClr val="475569"/>
+                </a:solidFill>
+                <a:latin typeface="Hind Siliguri"/>
+              </a:rPr>
+              <a:t>কল</a:t>
+            </a:r>
+            <a:r>
+              <a:rPr sz="2000" b="0" i="0" u="none" dirty="0">
+                <a:solidFill>
+                  <a:srgbClr val="475569"/>
+                </a:solidFill>
+                <a:latin typeface="Hind Siliguri"/>
+              </a:rPr>
+              <a:t>, </a:t>
+            </a:r>
+            <a:r>
+              <a:rPr sz="2000" b="0" i="0" u="none" dirty="0" err="1">
+                <a:solidFill>
+                  <a:srgbClr val="475569"/>
+                </a:solidFill>
+                <a:latin typeface="Hind Siliguri"/>
+              </a:rPr>
+              <a:t>মিটিং</a:t>
+            </a:r>
+            <a:r>
+              <a:rPr sz="2000" b="0" i="0" u="none" dirty="0">
+                <a:solidFill>
+                  <a:srgbClr val="475569"/>
+                </a:solidFill>
+                <a:latin typeface="Hind Siliguri"/>
+              </a:rPr>
+              <a:t> </a:t>
+            </a:r>
+            <a:r>
+              <a:rPr sz="2000" b="0" i="0" u="none" dirty="0" err="1">
+                <a:solidFill>
+                  <a:srgbClr val="475569"/>
+                </a:solidFill>
+                <a:latin typeface="Hind Siliguri"/>
+              </a:rPr>
+              <a:t>এবং</a:t>
+            </a:r>
+            <a:r>
+              <a:rPr sz="2000" b="0" i="0" u="none" dirty="0">
+                <a:solidFill>
+                  <a:srgbClr val="475569"/>
+                </a:solidFill>
+                <a:latin typeface="Hind Siliguri"/>
+              </a:rPr>
+              <a:t> </a:t>
+            </a:r>
+            <a:r>
+              <a:rPr sz="2000" b="0" i="0" u="none" dirty="0" err="1">
+                <a:solidFill>
+                  <a:srgbClr val="475569"/>
+                </a:solidFill>
+                <a:latin typeface="Hind Siliguri"/>
+              </a:rPr>
+              <a:t>ভয়েস</a:t>
+            </a:r>
+            <a:r>
+              <a:rPr sz="2000" b="0" i="0" u="none" dirty="0">
+                <a:solidFill>
+                  <a:srgbClr val="475569"/>
+                </a:solidFill>
+                <a:latin typeface="Hind Siliguri"/>
+              </a:rPr>
+              <a:t> </a:t>
+            </a:r>
+            <a:r>
+              <a:rPr sz="2000" b="0" i="0" u="none" dirty="0" err="1">
+                <a:solidFill>
+                  <a:srgbClr val="475569"/>
+                </a:solidFill>
+                <a:latin typeface="Hind Siliguri"/>
+              </a:rPr>
+              <a:t>রিকগনিশন</a:t>
+            </a:r>
+            <a:r>
+              <a:rPr sz="2000" b="0" i="0" u="none" dirty="0">
+                <a:solidFill>
+                  <a:srgbClr val="475569"/>
+                </a:solidFill>
+                <a:latin typeface="Hind Siliguri"/>
+              </a:rPr>
+              <a:t> </a:t>
+            </a:r>
+            <a:r>
+              <a:rPr sz="2000" b="0" i="0" u="none" dirty="0" err="1">
+                <a:solidFill>
+                  <a:srgbClr val="475569"/>
+                </a:solidFill>
+                <a:latin typeface="Hind Siliguri"/>
+              </a:rPr>
+              <a:t>সিস্টেম</a:t>
+            </a:r>
+            <a:r>
+              <a:rPr sz="2000" b="0" i="0" u="none" dirty="0">
+                <a:solidFill>
+                  <a:srgbClr val="475569"/>
+                </a:solidFill>
+                <a:latin typeface="Hind Siliguri"/>
+              </a:rPr>
+              <a:t>।</a:t>
             </a:r>
           </a:p>
         </p:txBody>
@@ -9198,7 +8028,7 @@
         <p:spPr>
           <a:xfrm>
             <a:off x="847725" y="3116460"/>
-            <a:ext cx="4905375" cy="276225"/>
+            <a:ext cx="4905375" cy="615553"/>
           </a:xfrm>
           <a:prstGeom prst="rect">
             <a:avLst/>
@@ -9213,7 +8043,7 @@
           <a:p>
             <a:pPr algn="l"/>
             <a:r>
-              <a:rPr sz="1350" b="0" i="0" u="none">
+              <a:rPr sz="2000" b="0" i="0" u="none">
                 <a:solidFill>
                   <a:srgbClr val="475569"/>
                 </a:solidFill>
@@ -9268,7 +8098,7 @@
         <p:spPr>
           <a:xfrm>
             <a:off x="847725" y="4478535"/>
-            <a:ext cx="4905375" cy="276225"/>
+            <a:ext cx="4905375" cy="615553"/>
           </a:xfrm>
           <a:prstGeom prst="rect">
             <a:avLst/>
@@ -9283,13 +8113,166 @@
           <a:p>
             <a:pPr algn="l"/>
             <a:r>
-              <a:rPr sz="1350" b="0" i="0" u="none">
-                <a:solidFill>
-                  <a:srgbClr val="475569"/>
-                </a:solidFill>
-                <a:latin typeface="Hind Siliguri"/>
-              </a:rPr>
-              <a:t>কাগজের দলিল ডিজিটাল ফাইলে আজীবন নিরাপদ সংরক্ষণ করা যায়।</a:t>
+              <a:rPr sz="2000" b="0" i="0" u="none" dirty="0" err="1">
+                <a:solidFill>
+                  <a:srgbClr val="475569"/>
+                </a:solidFill>
+                <a:latin typeface="Hind Siliguri"/>
+              </a:rPr>
+              <a:t>কাগজের</a:t>
+            </a:r>
+            <a:r>
+              <a:rPr sz="2000" b="0" i="0" u="none" dirty="0">
+                <a:solidFill>
+                  <a:srgbClr val="475569"/>
+                </a:solidFill>
+                <a:latin typeface="Hind Siliguri"/>
+              </a:rPr>
+              <a:t> </a:t>
+            </a:r>
+            <a:r>
+              <a:rPr sz="2000" b="0" i="0" u="none" dirty="0" err="1">
+                <a:solidFill>
+                  <a:srgbClr val="475569"/>
+                </a:solidFill>
+                <a:latin typeface="Hind Siliguri"/>
+              </a:rPr>
+              <a:t>দলিল</a:t>
+            </a:r>
+            <a:r>
+              <a:rPr sz="2000" b="0" i="0" u="none" dirty="0">
+                <a:solidFill>
+                  <a:srgbClr val="475569"/>
+                </a:solidFill>
+                <a:latin typeface="Hind Siliguri"/>
+              </a:rPr>
+              <a:t> </a:t>
+            </a:r>
+            <a:r>
+              <a:rPr sz="2000" b="0" i="0" u="none" dirty="0" err="1">
+                <a:solidFill>
+                  <a:srgbClr val="475569"/>
+                </a:solidFill>
+                <a:latin typeface="Hind Siliguri"/>
+              </a:rPr>
+              <a:t>ডিজিটাল</a:t>
+            </a:r>
+            <a:r>
+              <a:rPr sz="2000" b="0" i="0" u="none" dirty="0">
+                <a:solidFill>
+                  <a:srgbClr val="475569"/>
+                </a:solidFill>
+                <a:latin typeface="Hind Siliguri"/>
+              </a:rPr>
+              <a:t> </a:t>
+            </a:r>
+            <a:r>
+              <a:rPr sz="2000" b="0" i="0" u="none" dirty="0" err="1">
+                <a:solidFill>
+                  <a:srgbClr val="475569"/>
+                </a:solidFill>
+                <a:latin typeface="Hind Siliguri"/>
+              </a:rPr>
+              <a:t>ফাইলে</a:t>
+            </a:r>
+            <a:r>
+              <a:rPr sz="2000" b="0" i="0" u="none" dirty="0">
+                <a:solidFill>
+                  <a:srgbClr val="475569"/>
+                </a:solidFill>
+                <a:latin typeface="Hind Siliguri"/>
+              </a:rPr>
+              <a:t> </a:t>
+            </a:r>
+            <a:r>
+              <a:rPr sz="2000" b="0" i="0" u="none" dirty="0" err="1">
+                <a:solidFill>
+                  <a:srgbClr val="475569"/>
+                </a:solidFill>
+                <a:latin typeface="Hind Siliguri"/>
+              </a:rPr>
+              <a:t>আজীবন</a:t>
+            </a:r>
+            <a:r>
+              <a:rPr sz="2000" b="0" i="0" u="none" dirty="0">
+                <a:solidFill>
+                  <a:srgbClr val="475569"/>
+                </a:solidFill>
+                <a:latin typeface="Hind Siliguri"/>
+              </a:rPr>
+              <a:t> </a:t>
+            </a:r>
+            <a:r>
+              <a:rPr sz="2000" b="0" i="0" u="none" dirty="0" err="1">
+                <a:solidFill>
+                  <a:srgbClr val="475569"/>
+                </a:solidFill>
+                <a:latin typeface="Hind Siliguri"/>
+              </a:rPr>
+              <a:t>নিরাপদ</a:t>
+            </a:r>
+            <a:r>
+              <a:rPr sz="2000" b="0" i="0" u="none" dirty="0">
+                <a:solidFill>
+                  <a:srgbClr val="475569"/>
+                </a:solidFill>
+                <a:latin typeface="Hind Siliguri"/>
+              </a:rPr>
+              <a:t> </a:t>
+            </a:r>
+            <a:r>
+              <a:rPr sz="2000" b="0" i="0" u="none" dirty="0" err="1">
+                <a:solidFill>
+                  <a:srgbClr val="475569"/>
+                </a:solidFill>
+                <a:latin typeface="Hind Siliguri"/>
+              </a:rPr>
+              <a:t>সংরক্ষণ</a:t>
+            </a:r>
+            <a:r>
+              <a:rPr sz="2000" b="0" i="0" u="none" dirty="0">
+                <a:solidFill>
+                  <a:srgbClr val="475569"/>
+                </a:solidFill>
+                <a:latin typeface="Hind Siliguri"/>
+              </a:rPr>
+              <a:t> </a:t>
+            </a:r>
+            <a:r>
+              <a:rPr sz="2000" b="0" i="0" u="none" dirty="0" err="1">
+                <a:solidFill>
+                  <a:srgbClr val="475569"/>
+                </a:solidFill>
+                <a:latin typeface="Hind Siliguri"/>
+              </a:rPr>
+              <a:t>করা</a:t>
+            </a:r>
+            <a:r>
+              <a:rPr sz="2000" b="0" i="0" u="none" dirty="0">
+                <a:solidFill>
+                  <a:srgbClr val="475569"/>
+                </a:solidFill>
+                <a:latin typeface="Hind Siliguri"/>
+              </a:rPr>
+              <a:t> </a:t>
+            </a:r>
+            <a:r>
+              <a:rPr sz="2000" b="0" i="0" u="none" dirty="0" err="1">
+                <a:solidFill>
+                  <a:srgbClr val="475569"/>
+                </a:solidFill>
+                <a:latin typeface="Hind Siliguri"/>
+              </a:rPr>
+              <a:t>যায়</a:t>
+            </a:r>
+            <a:r>
+              <a:rPr sz="2000" b="0" i="0" u="none" dirty="0">
+                <a:solidFill>
+                  <a:srgbClr val="475569"/>
+                </a:solidFill>
+                <a:latin typeface="Hind Siliguri"/>
+              </a:rPr>
+              <a:t>।</a:t>
             </a:r>
           </a:p>
         </p:txBody>
@@ -9556,7 +8539,7 @@
         <p:spPr>
           <a:xfrm>
             <a:off x="6534150" y="3116460"/>
-            <a:ext cx="4905375" cy="276225"/>
+            <a:ext cx="4905375" cy="615553"/>
           </a:xfrm>
           <a:prstGeom prst="rect">
             <a:avLst/>
@@ -9571,7 +8554,7 @@
           <a:p>
             <a:pPr algn="l"/>
             <a:r>
-              <a:rPr sz="1350" b="0" i="0" u="none">
+              <a:rPr sz="2000" b="0" i="0" u="none">
                 <a:solidFill>
                   <a:srgbClr val="475569"/>
                 </a:solidFill>
@@ -9626,7 +8609,7 @@
         <p:spPr>
           <a:xfrm>
             <a:off x="6534150" y="4478535"/>
-            <a:ext cx="4905375" cy="276225"/>
+            <a:ext cx="4905375" cy="615553"/>
           </a:xfrm>
           <a:prstGeom prst="rect">
             <a:avLst/>
@@ -9641,7 +8624,7 @@
           <a:p>
             <a:pPr algn="l"/>
             <a:r>
-              <a:rPr sz="1350" b="0" i="0" u="none">
+              <a:rPr sz="2000" b="0" i="0" u="none">
                 <a:solidFill>
                   <a:srgbClr val="475569"/>
                 </a:solidFill>
@@ -9914,7 +8897,7 @@
         <p:spPr>
           <a:xfrm>
             <a:off x="847725" y="3116460"/>
-            <a:ext cx="4905375" cy="276225"/>
+            <a:ext cx="4905375" cy="615553"/>
           </a:xfrm>
           <a:prstGeom prst="rect">
             <a:avLst/>
@@ -9929,13 +8912,220 @@
           <a:p>
             <a:pPr algn="l"/>
             <a:r>
-              <a:rPr sz="1350" b="0" i="0" u="none">
-                <a:solidFill>
-                  <a:srgbClr val="475569"/>
-                </a:solidFill>
-                <a:latin typeface="Hind Siliguri"/>
-              </a:rPr>
-              <a:t>অস্থায়ী মেমোরি। বিদ্যুৎ চলে গেলে এর সব ডেটা সাথে সাথে মুছে যায়।</a:t>
+              <a:rPr sz="2000" b="0" i="0" u="none" dirty="0" err="1">
+                <a:solidFill>
+                  <a:srgbClr val="475569"/>
+                </a:solidFill>
+                <a:latin typeface="Hind Siliguri"/>
+              </a:rPr>
+              <a:t>অস্থায়ী</a:t>
+            </a:r>
+            <a:r>
+              <a:rPr sz="2000" b="0" i="0" u="none" dirty="0">
+                <a:solidFill>
+                  <a:srgbClr val="475569"/>
+                </a:solidFill>
+                <a:latin typeface="Hind Siliguri"/>
+              </a:rPr>
+              <a:t> </a:t>
+            </a:r>
+            <a:r>
+              <a:rPr sz="2000" b="0" i="0" u="none" dirty="0" err="1">
+                <a:solidFill>
+                  <a:srgbClr val="475569"/>
+                </a:solidFill>
+                <a:latin typeface="Hind Siliguri"/>
+              </a:rPr>
+              <a:t>মেমোরি</a:t>
+            </a:r>
+            <a:r>
+              <a:rPr sz="2000" b="0" i="0" u="none" dirty="0">
+                <a:solidFill>
+                  <a:srgbClr val="475569"/>
+                </a:solidFill>
+                <a:latin typeface="Hind Siliguri"/>
+              </a:rPr>
+              <a:t>। </a:t>
+            </a:r>
+            <a:r>
+              <a:rPr sz="2000" b="0" i="0" u="none" dirty="0" err="1">
+                <a:solidFill>
+                  <a:srgbClr val="475569"/>
+                </a:solidFill>
+                <a:latin typeface="Hind Siliguri"/>
+              </a:rPr>
+              <a:t>বিদ্যু</a:t>
+            </a:r>
+            <a:r>
+              <a:rPr sz="2000" b="0" i="0" u="none" dirty="0">
+                <a:solidFill>
+                  <a:srgbClr val="475569"/>
+                </a:solidFill>
+                <a:latin typeface="Hind Siliguri"/>
+              </a:rPr>
+              <a:t>ৎ </a:t>
+            </a:r>
+            <a:r>
+              <a:rPr sz="2000" b="0" i="0" u="none" dirty="0" err="1">
+                <a:solidFill>
+                  <a:srgbClr val="475569"/>
+                </a:solidFill>
+                <a:latin typeface="Hind Siliguri"/>
+              </a:rPr>
+              <a:t>চলে</a:t>
+            </a:r>
+            <a:r>
+              <a:rPr sz="2000" b="0" i="0" u="none" dirty="0">
+                <a:solidFill>
+                  <a:srgbClr val="475569"/>
+                </a:solidFill>
+                <a:latin typeface="Hind Siliguri"/>
+              </a:rPr>
+              <a:t> </a:t>
+            </a:r>
+            <a:r>
+              <a:rPr sz="2000" b="0" i="0" u="none" dirty="0" err="1">
+                <a:solidFill>
+                  <a:srgbClr val="475569"/>
+                </a:solidFill>
+                <a:latin typeface="Hind Siliguri"/>
+              </a:rPr>
+              <a:t>গেলে</a:t>
+            </a:r>
+            <a:r>
+              <a:rPr sz="2000" b="0" i="0" u="none" dirty="0">
+                <a:solidFill>
+                  <a:srgbClr val="475569"/>
+                </a:solidFill>
+                <a:latin typeface="Hind Siliguri"/>
+              </a:rPr>
+              <a:t> </a:t>
+            </a:r>
+            <a:r>
+              <a:rPr sz="2000" b="0" i="0" u="none" dirty="0" err="1">
+                <a:solidFill>
+                  <a:srgbClr val="475569"/>
+                </a:solidFill>
+                <a:latin typeface="Hind Siliguri"/>
+              </a:rPr>
+              <a:t>এর</a:t>
+            </a:r>
+            <a:r>
+              <a:rPr sz="2000" b="0" i="0" u="none" dirty="0">
+                <a:solidFill>
+                  <a:srgbClr val="475569"/>
+                </a:solidFill>
+                <a:latin typeface="Hind Siliguri"/>
+              </a:rPr>
+              <a:t> </a:t>
+            </a:r>
+            <a:r>
+              <a:rPr sz="2000" b="0" i="0" u="none" dirty="0" err="1">
+                <a:solidFill>
+                  <a:srgbClr val="475569"/>
+                </a:solidFill>
+                <a:latin typeface="Hind Siliguri"/>
+              </a:rPr>
+              <a:t>সব</a:t>
+            </a:r>
+            <a:r>
+              <a:rPr sz="2000" b="0" i="0" u="none" dirty="0">
+                <a:solidFill>
+                  <a:srgbClr val="475569"/>
+                </a:solidFill>
+                <a:latin typeface="Hind Siliguri"/>
+              </a:rPr>
+              <a:t> </a:t>
+            </a:r>
+            <a:r>
+              <a:rPr sz="2000" b="0" i="0" u="none" dirty="0" err="1">
+                <a:solidFill>
+                  <a:srgbClr val="475569"/>
+                </a:solidFill>
+                <a:latin typeface="Hind Siliguri"/>
+              </a:rPr>
+              <a:t>ডেটা</a:t>
+            </a:r>
+            <a:r>
+              <a:rPr sz="2000" b="0" i="0" u="none" dirty="0">
+                <a:solidFill>
+                  <a:srgbClr val="475569"/>
+                </a:solidFill>
+                <a:latin typeface="Hind Siliguri"/>
+              </a:rPr>
+              <a:t> </a:t>
+            </a:r>
+            <a:r>
+              <a:rPr sz="2000" b="0" i="0" u="none" dirty="0" err="1">
+                <a:solidFill>
+                  <a:srgbClr val="475569"/>
+                </a:solidFill>
+                <a:latin typeface="Hind Siliguri"/>
+              </a:rPr>
+              <a:t>সাথে</a:t>
+            </a:r>
+            <a:r>
+              <a:rPr sz="2000" b="0" i="0" u="none" dirty="0">
+                <a:solidFill>
+                  <a:srgbClr val="475569"/>
+                </a:solidFill>
+                <a:latin typeface="Hind Siliguri"/>
+              </a:rPr>
+              <a:t> </a:t>
+            </a:r>
+            <a:r>
+              <a:rPr sz="2000" b="0" i="0" u="none" dirty="0" err="1">
+                <a:solidFill>
+                  <a:srgbClr val="475569"/>
+                </a:solidFill>
+                <a:latin typeface="Hind Siliguri"/>
+              </a:rPr>
+              <a:t>সাথে</a:t>
+            </a:r>
+            <a:r>
+              <a:rPr sz="2000" b="0" i="0" u="none" dirty="0">
+                <a:solidFill>
+                  <a:srgbClr val="475569"/>
+                </a:solidFill>
+                <a:latin typeface="Hind Siliguri"/>
+              </a:rPr>
+              <a:t> </a:t>
+            </a:r>
+            <a:r>
+              <a:rPr sz="2000" b="0" i="0" u="none" dirty="0" err="1">
+                <a:solidFill>
+                  <a:srgbClr val="475569"/>
+                </a:solidFill>
+                <a:latin typeface="Hind Siliguri"/>
+              </a:rPr>
+              <a:t>মুছে</a:t>
+            </a:r>
+            <a:r>
+              <a:rPr sz="2000" b="0" i="0" u="none" dirty="0">
+                <a:solidFill>
+                  <a:srgbClr val="475569"/>
+                </a:solidFill>
+                <a:latin typeface="Hind Siliguri"/>
+              </a:rPr>
+              <a:t> </a:t>
+            </a:r>
+            <a:r>
+              <a:rPr sz="2000" b="0" i="0" u="none" dirty="0" err="1">
+                <a:solidFill>
+                  <a:srgbClr val="475569"/>
+                </a:solidFill>
+                <a:latin typeface="Hind Siliguri"/>
+              </a:rPr>
+              <a:t>যায়</a:t>
+            </a:r>
+            <a:r>
+              <a:rPr sz="2000" b="0" i="0" u="none" dirty="0">
+                <a:solidFill>
+                  <a:srgbClr val="475569"/>
+                </a:solidFill>
+                <a:latin typeface="Hind Siliguri"/>
+              </a:rPr>
+              <a:t>।</a:t>
             </a:r>
           </a:p>
         </p:txBody>
@@ -9984,7 +9174,7 @@
         <p:spPr>
           <a:xfrm>
             <a:off x="847725" y="4478535"/>
-            <a:ext cx="4905375" cy="276225"/>
+            <a:ext cx="4905375" cy="615553"/>
           </a:xfrm>
           <a:prstGeom prst="rect">
             <a:avLst/>
@@ -9999,7 +9189,7 @@
           <a:p>
             <a:pPr algn="l"/>
             <a:r>
-              <a:rPr sz="1350" b="0" i="0" u="none">
+              <a:rPr sz="2000" b="0" i="0" u="none">
                 <a:solidFill>
                   <a:srgbClr val="475569"/>
                 </a:solidFill>
@@ -10272,7 +9462,7 @@
         <p:spPr>
           <a:xfrm>
             <a:off x="6534150" y="3116460"/>
-            <a:ext cx="4905375" cy="276225"/>
+            <a:ext cx="4905375" cy="615553"/>
           </a:xfrm>
           <a:prstGeom prst="rect">
             <a:avLst/>
@@ -10287,7 +9477,7 @@
           <a:p>
             <a:pPr algn="l"/>
             <a:r>
-              <a:rPr sz="1350" b="0" i="0" u="none">
+              <a:rPr sz="2000" b="0" i="0" u="none">
                 <a:solidFill>
                   <a:srgbClr val="475569"/>
                 </a:solidFill>
@@ -10342,7 +9532,7 @@
         <p:spPr>
           <a:xfrm>
             <a:off x="6534150" y="4478535"/>
-            <a:ext cx="4905375" cy="276225"/>
+            <a:ext cx="4905375" cy="615553"/>
           </a:xfrm>
           <a:prstGeom prst="rect">
             <a:avLst/>
@@ -10357,7 +9547,7 @@
           <a:p>
             <a:pPr algn="l"/>
             <a:r>
-              <a:rPr sz="1350" b="0" i="0" u="none">
+              <a:rPr sz="2000" b="0" i="0" u="none">
                 <a:solidFill>
                   <a:srgbClr val="475569"/>
                 </a:solidFill>
